--- a/Reto final/Macroentorno_Ecuatoriano_Presentacion.pptx
+++ b/Reto final/Macroentorno_Ecuatoriano_Presentacion.pptx
@@ -5,7 +5,7 @@
     <p:sldMasterId id="2147483648" r:id="rId1"/>
   </p:sldMasterIdLst>
   <p:notesMasterIdLst>
-    <p:notesMasterId r:id="rId11"/>
+    <p:notesMasterId r:id="rId12"/>
   </p:notesMasterIdLst>
   <p:sldIdLst>
     <p:sldId id="256" r:id="rId2"/>
@@ -14,9 +14,10 @@
     <p:sldId id="263" r:id="rId5"/>
     <p:sldId id="264" r:id="rId6"/>
     <p:sldId id="269" r:id="rId7"/>
-    <p:sldId id="270" r:id="rId8"/>
-    <p:sldId id="273" r:id="rId9"/>
-    <p:sldId id="274" r:id="rId10"/>
+    <p:sldId id="275" r:id="rId8"/>
+    <p:sldId id="276" r:id="rId9"/>
+    <p:sldId id="273" r:id="rId10"/>
+    <p:sldId id="274" r:id="rId11"/>
   </p:sldIdLst>
   <p:sldSz cx="12192000" cy="6858000"/>
   <p:notesSz cx="6858000" cy="12192000"/>
@@ -329,6 +330,90 @@
 </p:notes>
 </file>
 
+<file path=ppt/notesSlides/notesSlide10.xml><?xml version="1.0" encoding="utf-8"?>
+<p:notes xmlns:a="http://schemas.openxmlformats.org/drawingml/2006/main" xmlns:r="http://schemas.openxmlformats.org/officeDocument/2006/relationships" xmlns:p="http://schemas.openxmlformats.org/presentationml/2006/main">
+  <p:cSld>
+    <p:spTree>
+      <p:nvGrpSpPr>
+        <p:cNvPr id="1" name=""/>
+        <p:cNvGrpSpPr/>
+        <p:nvPr/>
+      </p:nvGrpSpPr>
+      <p:grpSpPr>
+        <a:xfrm>
+          <a:off x="0" y="0"/>
+          <a:ext cx="0" cy="0"/>
+          <a:chOff x="0" y="0"/>
+          <a:chExt cx="0" cy="0"/>
+        </a:xfrm>
+      </p:grpSpPr>
+      <p:sp>
+        <p:nvSpPr>
+          <p:cNvPr id="2" name="Slide Image Placeholder 1"/>
+          <p:cNvSpPr>
+            <a:spLocks noGrp="1" noRot="1" noChangeAspect="1"/>
+          </p:cNvSpPr>
+          <p:nvPr>
+            <p:ph type="sldImg"/>
+          </p:nvPr>
+        </p:nvSpPr>
+        <p:spPr/>
+      </p:sp>
+      <p:sp>
+        <p:nvSpPr>
+          <p:cNvPr id="3" name="Notes Placeholder 2"/>
+          <p:cNvSpPr>
+            <a:spLocks noGrp="1"/>
+          </p:cNvSpPr>
+          <p:nvPr>
+            <p:ph type="body" idx="1"/>
+          </p:nvPr>
+        </p:nvSpPr>
+        <p:spPr/>
+        <p:txBody>
+          <a:bodyPr/>
+          <a:lstStyle/>
+          <a:p>
+            <a:endParaRPr lang="en-US" dirty="0"/>
+          </a:p>
+        </p:txBody>
+      </p:sp>
+      <p:sp>
+        <p:nvSpPr>
+          <p:cNvPr id="4" name="Slide Number Placeholder 3"/>
+          <p:cNvSpPr>
+            <a:spLocks noGrp="1"/>
+          </p:cNvSpPr>
+          <p:nvPr>
+            <p:ph type="sldNum" sz="quarter" idx="10"/>
+          </p:nvPr>
+        </p:nvSpPr>
+        <p:spPr/>
+        <p:txBody>
+          <a:bodyPr/>
+          <a:lstStyle/>
+          <a:p>
+            <a:fld id="{F7021451-1387-4CA6-816F-3879F97B5CBC}" type="slidenum">
+              <a:rPr lang="en-US"/>
+              <a:t>10</a:t>
+            </a:fld>
+            <a:endParaRPr lang="en-US"/>
+          </a:p>
+        </p:txBody>
+      </p:sp>
+    </p:spTree>
+    <p:extLst>
+      <p:ext uri="{BB962C8B-B14F-4D97-AF65-F5344CB8AC3E}">
+        <p14:creationId xmlns:p14="http://schemas.microsoft.com/office/powerpoint/2010/main" val="1024086991"/>
+      </p:ext>
+    </p:extLst>
+  </p:cSld>
+  <p:clrMapOvr>
+    <a:masterClrMapping/>
+  </p:clrMapOvr>
+</p:notes>
+</file>
+
 <file path=ppt/notesSlides/notesSlide2.xml><?xml version="1.0" encoding="utf-8"?>
 <p:notes xmlns:a="http://schemas.openxmlformats.org/drawingml/2006/main" xmlns:r="http://schemas.openxmlformats.org/officeDocument/2006/relationships" xmlns:p="http://schemas.openxmlformats.org/presentationml/2006/main">
   <p:cSld>
@@ -754,7 +839,13 @@
   <p:cSld>
     <p:spTree>
       <p:nvGrpSpPr>
-        <p:cNvPr id="1" name=""/>
+        <p:cNvPr id="1" name="">
+          <a:extLst>
+            <a:ext uri="{FF2B5EF4-FFF2-40B4-BE49-F238E27FC236}">
+              <a16:creationId xmlns:a16="http://schemas.microsoft.com/office/drawing/2014/main" id="{493A33A6-1492-D6B8-588D-73E62179B1AE}"/>
+            </a:ext>
+          </a:extLst>
+        </p:cNvPr>
         <p:cNvGrpSpPr/>
         <p:nvPr/>
       </p:nvGrpSpPr>
@@ -768,7 +859,13 @@
       </p:grpSpPr>
       <p:sp>
         <p:nvSpPr>
-          <p:cNvPr id="2" name="Slide Image Placeholder 1"/>
+          <p:cNvPr id="2" name="Slide Image Placeholder 1">
+            <a:extLst>
+              <a:ext uri="{FF2B5EF4-FFF2-40B4-BE49-F238E27FC236}">
+                <a16:creationId xmlns:a16="http://schemas.microsoft.com/office/drawing/2014/main" id="{94F82D9F-972F-7EEF-DEE1-FFD18E1944E6}"/>
+              </a:ext>
+            </a:extLst>
+          </p:cNvPr>
           <p:cNvSpPr>
             <a:spLocks noGrp="1" noRot="1" noChangeAspect="1"/>
           </p:cNvSpPr>
@@ -780,7 +877,13 @@
       </p:sp>
       <p:sp>
         <p:nvSpPr>
-          <p:cNvPr id="3" name="Notes Placeholder 2"/>
+          <p:cNvPr id="3" name="Notes Placeholder 2">
+            <a:extLst>
+              <a:ext uri="{FF2B5EF4-FFF2-40B4-BE49-F238E27FC236}">
+                <a16:creationId xmlns:a16="http://schemas.microsoft.com/office/drawing/2014/main" id="{2D90DA21-0339-AD1C-A0D9-03936BCE7CE9}"/>
+              </a:ext>
+            </a:extLst>
+          </p:cNvPr>
           <p:cNvSpPr>
             <a:spLocks noGrp="1"/>
           </p:cNvSpPr>
@@ -799,7 +902,13 @@
       </p:sp>
       <p:sp>
         <p:nvSpPr>
-          <p:cNvPr id="4" name="Slide Number Placeholder 3"/>
+          <p:cNvPr id="4" name="Slide Number Placeholder 3">
+            <a:extLst>
+              <a:ext uri="{FF2B5EF4-FFF2-40B4-BE49-F238E27FC236}">
+                <a16:creationId xmlns:a16="http://schemas.microsoft.com/office/drawing/2014/main" id="{9F90E6D6-ECBF-1FE6-2F44-9DE7FC7F9E07}"/>
+              </a:ext>
+            </a:extLst>
+          </p:cNvPr>
           <p:cNvSpPr>
             <a:spLocks noGrp="1"/>
           </p:cNvSpPr>
@@ -823,7 +932,7 @@
     </p:spTree>
     <p:extLst>
       <p:ext uri="{BB962C8B-B14F-4D97-AF65-F5344CB8AC3E}">
-        <p14:creationId xmlns:p14="http://schemas.microsoft.com/office/powerpoint/2010/main" val="1024086991"/>
+        <p14:creationId xmlns:p14="http://schemas.microsoft.com/office/powerpoint/2010/main" val="1533962379"/>
       </p:ext>
     </p:extLst>
   </p:cSld>
@@ -838,7 +947,13 @@
   <p:cSld>
     <p:spTree>
       <p:nvGrpSpPr>
-        <p:cNvPr id="1" name=""/>
+        <p:cNvPr id="1" name="">
+          <a:extLst>
+            <a:ext uri="{FF2B5EF4-FFF2-40B4-BE49-F238E27FC236}">
+              <a16:creationId xmlns:a16="http://schemas.microsoft.com/office/drawing/2014/main" id="{9AE9990A-A92B-C328-CEDC-6F22E7808E78}"/>
+            </a:ext>
+          </a:extLst>
+        </p:cNvPr>
         <p:cNvGrpSpPr/>
         <p:nvPr/>
       </p:nvGrpSpPr>
@@ -852,7 +967,13 @@
       </p:grpSpPr>
       <p:sp>
         <p:nvSpPr>
-          <p:cNvPr id="2" name="Slide Image Placeholder 1"/>
+          <p:cNvPr id="2" name="Slide Image Placeholder 1">
+            <a:extLst>
+              <a:ext uri="{FF2B5EF4-FFF2-40B4-BE49-F238E27FC236}">
+                <a16:creationId xmlns:a16="http://schemas.microsoft.com/office/drawing/2014/main" id="{927E68C6-4FC3-3B37-FD1F-F536F73B820D}"/>
+              </a:ext>
+            </a:extLst>
+          </p:cNvPr>
           <p:cNvSpPr>
             <a:spLocks noGrp="1" noRot="1" noChangeAspect="1"/>
           </p:cNvSpPr>
@@ -864,7 +985,13 @@
       </p:sp>
       <p:sp>
         <p:nvSpPr>
-          <p:cNvPr id="3" name="Notes Placeholder 2"/>
+          <p:cNvPr id="3" name="Notes Placeholder 2">
+            <a:extLst>
+              <a:ext uri="{FF2B5EF4-FFF2-40B4-BE49-F238E27FC236}">
+                <a16:creationId xmlns:a16="http://schemas.microsoft.com/office/drawing/2014/main" id="{98796BED-490D-93B4-DEE9-77977C4FFABD}"/>
+              </a:ext>
+            </a:extLst>
+          </p:cNvPr>
           <p:cNvSpPr>
             <a:spLocks noGrp="1"/>
           </p:cNvSpPr>
@@ -883,7 +1010,13 @@
       </p:sp>
       <p:sp>
         <p:nvSpPr>
-          <p:cNvPr id="4" name="Slide Number Placeholder 3"/>
+          <p:cNvPr id="4" name="Slide Number Placeholder 3">
+            <a:extLst>
+              <a:ext uri="{FF2B5EF4-FFF2-40B4-BE49-F238E27FC236}">
+                <a16:creationId xmlns:a16="http://schemas.microsoft.com/office/drawing/2014/main" id="{52B8424F-9F54-8DA5-ABEA-1AE5C2067086}"/>
+              </a:ext>
+            </a:extLst>
+          </p:cNvPr>
           <p:cNvSpPr>
             <a:spLocks noGrp="1"/>
           </p:cNvSpPr>
@@ -907,7 +1040,7 @@
     </p:spTree>
     <p:extLst>
       <p:ext uri="{BB962C8B-B14F-4D97-AF65-F5344CB8AC3E}">
-        <p14:creationId xmlns:p14="http://schemas.microsoft.com/office/powerpoint/2010/main" val="1024086991"/>
+        <p14:creationId xmlns:p14="http://schemas.microsoft.com/office/powerpoint/2010/main" val="428144453"/>
       </p:ext>
     </p:extLst>
   </p:cSld>
@@ -1460,45 +1593,6 @@
       </p:sp>
       <p:sp>
         <p:nvSpPr>
-          <p:cNvPr id="7" name="Text 5"/>
-          <p:cNvSpPr/>
-          <p:nvPr/>
-        </p:nvSpPr>
-        <p:spPr>
-          <a:xfrm>
-            <a:off x="640080" y="896112"/>
-            <a:ext cx="7315200" cy="320040"/>
-          </a:xfrm>
-          <a:prstGeom prst="rect">
-            <a:avLst/>
-          </a:prstGeom>
-          <a:noFill/>
-          <a:ln/>
-        </p:spPr>
-        <p:txBody>
-          <a:bodyPr wrap="square" rtlCol="0" anchor="ctr"/>
-          <a:lstStyle/>
-          <a:p>
-            <a:pPr marL="0" indent="0">
-              <a:buNone/>
-            </a:pPr>
-            <a:r>
-              <a:rPr lang="en-US" sz="1200" dirty="0" err="1">
-                <a:solidFill>
-                  <a:srgbClr val="A9BEDD"/>
-                </a:solidFill>
-                <a:latin typeface="Calibri" pitchFamily="34" charset="0"/>
-                <a:ea typeface="Calibri" pitchFamily="34" charset="-122"/>
-                <a:cs typeface="Calibri" pitchFamily="34" charset="-120"/>
-              </a:rPr>
-              <a:t>Computación</a:t>
-            </a:r>
-            <a:endParaRPr lang="en-US" sz="1200" dirty="0"/>
-          </a:p>
-        </p:txBody>
-      </p:sp>
-      <p:sp>
-        <p:nvSpPr>
           <p:cNvPr id="8" name="Text 6"/>
           <p:cNvSpPr/>
           <p:nvPr/>
@@ -1644,6 +1738,198 @@
                 <a:cs typeface="Calibri" pitchFamily="34" charset="-120"/>
               </a:rPr>
               <a:t>Julio, 2026</a:t>
+            </a:r>
+            <a:endParaRPr lang="en-US" sz="1300" dirty="0"/>
+          </a:p>
+        </p:txBody>
+      </p:sp>
+    </p:spTree>
+  </p:cSld>
+  <p:clrMapOvr>
+    <a:masterClrMapping/>
+  </p:clrMapOvr>
+</p:sld>
+</file>
+
+<file path=ppt/slides/slide10.xml><?xml version="1.0" encoding="utf-8"?>
+<p:sld xmlns:a="http://schemas.openxmlformats.org/drawingml/2006/main" xmlns:r="http://schemas.openxmlformats.org/officeDocument/2006/relationships" xmlns:p="http://schemas.openxmlformats.org/presentationml/2006/main">
+  <p:cSld name="Slide 19">
+    <p:bg>
+      <p:bgPr>
+        <a:solidFill>
+          <a:srgbClr val="21295C"/>
+        </a:solidFill>
+        <a:effectLst/>
+      </p:bgPr>
+    </p:bg>
+    <p:spTree>
+      <p:nvGrpSpPr>
+        <p:cNvPr id="1" name=""/>
+        <p:cNvGrpSpPr/>
+        <p:nvPr/>
+      </p:nvGrpSpPr>
+      <p:grpSpPr>
+        <a:xfrm>
+          <a:off x="0" y="0"/>
+          <a:ext cx="0" cy="0"/>
+          <a:chOff x="0" y="0"/>
+          <a:chExt cx="0" cy="0"/>
+        </a:xfrm>
+      </p:grpSpPr>
+      <p:sp>
+        <p:nvSpPr>
+          <p:cNvPr id="3" name="Shape 1"/>
+          <p:cNvSpPr/>
+          <p:nvPr/>
+        </p:nvSpPr>
+        <p:spPr>
+          <a:xfrm>
+            <a:off x="0" y="0"/>
+            <a:ext cx="3959352" cy="2194560"/>
+          </a:xfrm>
+          <a:prstGeom prst="rect">
+            <a:avLst/>
+          </a:prstGeom>
+          <a:solidFill>
+            <a:srgbClr val="065A82"/>
+          </a:solidFill>
+          <a:ln/>
+        </p:spPr>
+        <p:txBody>
+          <a:bodyPr/>
+          <a:lstStyle/>
+          <a:p>
+            <a:endParaRPr lang="es-EC"/>
+          </a:p>
+        </p:txBody>
+      </p:sp>
+      <p:sp>
+        <p:nvSpPr>
+          <p:cNvPr id="4" name="Shape 2"/>
+          <p:cNvSpPr/>
+          <p:nvPr/>
+        </p:nvSpPr>
+        <p:spPr>
+          <a:xfrm>
+            <a:off x="0" y="2148840"/>
+            <a:ext cx="3410712" cy="2194560"/>
+          </a:xfrm>
+          <a:prstGeom prst="rect">
+            <a:avLst/>
+          </a:prstGeom>
+          <a:solidFill>
+            <a:srgbClr val="1C7293"/>
+          </a:solidFill>
+          <a:ln/>
+        </p:spPr>
+        <p:txBody>
+          <a:bodyPr/>
+          <a:lstStyle/>
+          <a:p>
+            <a:endParaRPr lang="es-EC"/>
+          </a:p>
+        </p:txBody>
+      </p:sp>
+      <p:sp>
+        <p:nvSpPr>
+          <p:cNvPr id="5" name="Shape 3"/>
+          <p:cNvSpPr/>
+          <p:nvPr/>
+        </p:nvSpPr>
+        <p:spPr>
+          <a:xfrm>
+            <a:off x="0" y="4297680"/>
+            <a:ext cx="2862072" cy="2194560"/>
+          </a:xfrm>
+          <a:prstGeom prst="rect">
+            <a:avLst/>
+          </a:prstGeom>
+          <a:solidFill>
+            <a:srgbClr val="5FB3A3"/>
+          </a:solidFill>
+          <a:ln/>
+        </p:spPr>
+        <p:txBody>
+          <a:bodyPr/>
+          <a:lstStyle/>
+          <a:p>
+            <a:endParaRPr lang="es-EC"/>
+          </a:p>
+        </p:txBody>
+      </p:sp>
+      <p:sp>
+        <p:nvSpPr>
+          <p:cNvPr id="6" name="Text 4"/>
+          <p:cNvSpPr/>
+          <p:nvPr/>
+        </p:nvSpPr>
+        <p:spPr>
+          <a:xfrm>
+            <a:off x="4572000" y="2468880"/>
+            <a:ext cx="6949440" cy="1005840"/>
+          </a:xfrm>
+          <a:prstGeom prst="rect">
+            <a:avLst/>
+          </a:prstGeom>
+          <a:noFill/>
+          <a:ln/>
+        </p:spPr>
+        <p:txBody>
+          <a:bodyPr wrap="square" rtlCol="0" anchor="ctr"/>
+          <a:lstStyle/>
+          <a:p>
+            <a:pPr marL="0" indent="0">
+              <a:buNone/>
+            </a:pPr>
+            <a:r>
+              <a:rPr lang="en-US" sz="4200" b="1" dirty="0">
+                <a:solidFill>
+                  <a:srgbClr val="FFFFFF"/>
+                </a:solidFill>
+                <a:latin typeface="Cambria" pitchFamily="34" charset="0"/>
+                <a:ea typeface="Cambria" pitchFamily="34" charset="-122"/>
+                <a:cs typeface="Cambria" pitchFamily="34" charset="-120"/>
+              </a:rPr>
+              <a:t>Gracias</a:t>
+            </a:r>
+            <a:endParaRPr lang="en-US" sz="4200" dirty="0"/>
+          </a:p>
+        </p:txBody>
+      </p:sp>
+      <p:sp>
+        <p:nvSpPr>
+          <p:cNvPr id="8" name="Text 6"/>
+          <p:cNvSpPr/>
+          <p:nvPr/>
+        </p:nvSpPr>
+        <p:spPr>
+          <a:xfrm>
+            <a:off x="4572000" y="4114800"/>
+            <a:ext cx="6400800" cy="365760"/>
+          </a:xfrm>
+          <a:prstGeom prst="rect">
+            <a:avLst/>
+          </a:prstGeom>
+          <a:noFill/>
+          <a:ln/>
+        </p:spPr>
+        <p:txBody>
+          <a:bodyPr wrap="square" rtlCol="0" anchor="ctr"/>
+          <a:lstStyle/>
+          <a:p>
+            <a:pPr marL="0" indent="0">
+              <a:buNone/>
+            </a:pPr>
+            <a:r>
+              <a:rPr lang="en-US" sz="1300" b="1" dirty="0">
+                <a:solidFill>
+                  <a:srgbClr val="FFFFFF"/>
+                </a:solidFill>
+                <a:latin typeface="Calibri" pitchFamily="34" charset="0"/>
+                <a:ea typeface="Calibri" pitchFamily="34" charset="-122"/>
+                <a:cs typeface="Calibri" pitchFamily="34" charset="-120"/>
+              </a:rPr>
+              <a:t>Mateo Leonardo Yaguache Plaza</a:t>
             </a:r>
             <a:endParaRPr lang="en-US" sz="1300" dirty="0"/>
           </a:p>
@@ -2531,45 +2817,6 @@
           </a:p>
         </p:txBody>
       </p:sp>
-      <p:sp>
-        <p:nvSpPr>
-          <p:cNvPr id="29" name="Text 22"/>
-          <p:cNvSpPr/>
-          <p:nvPr/>
-        </p:nvSpPr>
-        <p:spPr>
-          <a:xfrm>
-            <a:off x="11365992" y="6400800"/>
-            <a:ext cx="548640" cy="274320"/>
-          </a:xfrm>
-          <a:prstGeom prst="rect">
-            <a:avLst/>
-          </a:prstGeom>
-          <a:noFill/>
-          <a:ln/>
-        </p:spPr>
-        <p:txBody>
-          <a:bodyPr wrap="square" rtlCol="0" anchor="ctr"/>
-          <a:lstStyle/>
-          <a:p>
-            <a:pPr marL="0" indent="0" algn="r">
-              <a:buNone/>
-            </a:pPr>
-            <a:r>
-              <a:rPr lang="en-US" sz="1000" dirty="0">
-                <a:solidFill>
-                  <a:srgbClr val="6B7480"/>
-                </a:solidFill>
-                <a:latin typeface="Calibri" pitchFamily="34" charset="0"/>
-                <a:ea typeface="Calibri" pitchFamily="34" charset="-122"/>
-                <a:cs typeface="Calibri" pitchFamily="34" charset="-120"/>
-              </a:rPr>
-              <a:t>03</a:t>
-            </a:r>
-            <a:endParaRPr lang="en-US" sz="1000" dirty="0"/>
-          </a:p>
-        </p:txBody>
-      </p:sp>
     </p:spTree>
   </p:cSld>
   <p:clrMapOvr>
@@ -3457,7 +3704,7 @@
                 <a:ea typeface="Cambria" pitchFamily="34" charset="-122"/>
                 <a:cs typeface="Cambria" pitchFamily="34" charset="-120"/>
               </a:rPr>
-              <a:t>Cuatro instituciones, doce datasets, 900 mil+ registros</a:t>
+              <a:t>Cuatro instituciones, doce datasets, 1,6 mill+ registros</a:t>
             </a:r>
             <a:endParaRPr lang="en-US" sz="3000" dirty="0"/>
           </a:p>
@@ -4680,7 +4927,7 @@
               <a:t>12 datasets integrados  ·  </a:t>
             </a:r>
             <a:r>
-              <a:rPr lang="en-US" sz="1300" dirty="0">
+              <a:rPr lang="en-US" sz="1300" dirty="0" err="1">
                 <a:solidFill>
                   <a:srgbClr val="2B2B33"/>
                 </a:solidFill>
@@ -4688,7 +4935,40 @@
                 <a:ea typeface="Calibri" pitchFamily="34" charset="-122"/>
                 <a:cs typeface="Calibri" pitchFamily="34" charset="-120"/>
               </a:rPr>
-              <a:t>más de 900,000 registros consolidados en un esquema relacional único</a:t>
+              <a:t>más</a:t>
+            </a:r>
+            <a:r>
+              <a:rPr lang="en-US" sz="1300" dirty="0">
+                <a:solidFill>
+                  <a:srgbClr val="2B2B33"/>
+                </a:solidFill>
+                <a:latin typeface="Calibri" pitchFamily="34" charset="0"/>
+                <a:ea typeface="Calibri" pitchFamily="34" charset="-122"/>
+                <a:cs typeface="Calibri" pitchFamily="34" charset="-120"/>
+              </a:rPr>
+              <a:t> de 1.6mill </a:t>
+            </a:r>
+            <a:r>
+              <a:rPr lang="en-US" sz="1300" dirty="0" err="1">
+                <a:solidFill>
+                  <a:srgbClr val="2B2B33"/>
+                </a:solidFill>
+                <a:latin typeface="Calibri" pitchFamily="34" charset="0"/>
+                <a:ea typeface="Calibri" pitchFamily="34" charset="-122"/>
+                <a:cs typeface="Calibri" pitchFamily="34" charset="-120"/>
+              </a:rPr>
+              <a:t>registros</a:t>
+            </a:r>
+            <a:r>
+              <a:rPr lang="en-US" sz="1300" dirty="0">
+                <a:solidFill>
+                  <a:srgbClr val="2B2B33"/>
+                </a:solidFill>
+                <a:latin typeface="Calibri" pitchFamily="34" charset="0"/>
+                <a:ea typeface="Calibri" pitchFamily="34" charset="-122"/>
+                <a:cs typeface="Calibri" pitchFamily="34" charset="-120"/>
+              </a:rPr>
+              <a:t> consolidados en un esquema relacional único</a:t>
             </a:r>
             <a:endParaRPr lang="en-US" sz="1300" dirty="0"/>
           </a:p>
@@ -4909,45 +5189,6 @@
       </p:grpSpPr>
       <p:sp>
         <p:nvSpPr>
-          <p:cNvPr id="2" name="Text 0"/>
-          <p:cNvSpPr/>
-          <p:nvPr/>
-        </p:nvSpPr>
-        <p:spPr>
-          <a:xfrm>
-            <a:off x="548640" y="411480"/>
-            <a:ext cx="7315200" cy="320040"/>
-          </a:xfrm>
-          <a:prstGeom prst="rect">
-            <a:avLst/>
-          </a:prstGeom>
-          <a:noFill/>
-          <a:ln/>
-        </p:spPr>
-        <p:txBody>
-          <a:bodyPr wrap="square" rtlCol="0" anchor="ctr"/>
-          <a:lstStyle/>
-          <a:p>
-            <a:pPr marL="0" indent="0">
-              <a:buNone/>
-            </a:pPr>
-            <a:r>
-              <a:rPr lang="en-US" sz="1200" b="1" kern="0" spc="200" dirty="0">
-                <a:solidFill>
-                  <a:srgbClr val="1C7293"/>
-                </a:solidFill>
-                <a:latin typeface="Calibri" pitchFamily="34" charset="0"/>
-                <a:ea typeface="Calibri" pitchFamily="34" charset="-122"/>
-                <a:cs typeface="Calibri" pitchFamily="34" charset="-120"/>
-              </a:rPr>
-              <a:t>RETO 2 · MACROENTORNO — CAPA GOLD</a:t>
-            </a:r>
-            <a:endParaRPr lang="en-US" sz="1200" dirty="0"/>
-          </a:p>
-        </p:txBody>
-      </p:sp>
-      <p:sp>
-        <p:nvSpPr>
           <p:cNvPr id="3" name="Text 1"/>
           <p:cNvSpPr/>
           <p:nvPr/>
@@ -5955,9 +6196,6 @@
           <a:bodyPr wrap="square" rtlCol="0" anchor="t"/>
           <a:lstStyle/>
           <a:p>
-            <a:pPr marL="0" indent="0">
-              <a:buNone/>
-            </a:pPr>
             <a:r>
               <a:rPr lang="en-US" sz="1080" dirty="0">
                 <a:solidFill>
@@ -5967,7 +6205,29 @@
                 <a:ea typeface="Calibri" pitchFamily="34" charset="-122"/>
                 <a:cs typeface="Calibri" pitchFamily="34" charset="-120"/>
               </a:rPr>
-              <a:t>¿Sectores con mayor optimismo?</a:t>
+              <a:t>¿</a:t>
+            </a:r>
+            <a:r>
+              <a:rPr lang="es-ES" sz="1080" dirty="0">
+                <a:solidFill>
+                  <a:srgbClr val="6B7480"/>
+                </a:solidFill>
+                <a:latin typeface="Calibri" pitchFamily="34" charset="0"/>
+                <a:ea typeface="Calibri" pitchFamily="34" charset="-122"/>
+                <a:cs typeface="Calibri" pitchFamily="34" charset="-120"/>
+              </a:rPr>
+              <a:t>Cuál es el nivel de optimismo empresarial</a:t>
+            </a:r>
+            <a:r>
+              <a:rPr lang="en-US" sz="1080" dirty="0">
+                <a:solidFill>
+                  <a:srgbClr val="6B7480"/>
+                </a:solidFill>
+                <a:latin typeface="Calibri" pitchFamily="34" charset="0"/>
+                <a:ea typeface="Calibri" pitchFamily="34" charset="-122"/>
+                <a:cs typeface="Calibri" pitchFamily="34" charset="-120"/>
+              </a:rPr>
+              <a:t>?</a:t>
             </a:r>
             <a:endParaRPr lang="en-US" sz="1080" dirty="0"/>
           </a:p>
@@ -6296,45 +6556,6 @@
               <a:t>filas</a:t>
             </a:r>
             <a:endParaRPr lang="en-US" sz="850" dirty="0"/>
-          </a:p>
-        </p:txBody>
-      </p:sp>
-      <p:sp>
-        <p:nvSpPr>
-          <p:cNvPr id="40" name="Text 38"/>
-          <p:cNvSpPr/>
-          <p:nvPr/>
-        </p:nvSpPr>
-        <p:spPr>
-          <a:xfrm>
-            <a:off x="11365992" y="6400800"/>
-            <a:ext cx="548640" cy="274320"/>
-          </a:xfrm>
-          <a:prstGeom prst="rect">
-            <a:avLst/>
-          </a:prstGeom>
-          <a:noFill/>
-          <a:ln/>
-        </p:spPr>
-        <p:txBody>
-          <a:bodyPr wrap="square" rtlCol="0" anchor="ctr"/>
-          <a:lstStyle/>
-          <a:p>
-            <a:pPr marL="0" indent="0" algn="r">
-              <a:buNone/>
-            </a:pPr>
-            <a:r>
-              <a:rPr lang="en-US" sz="1000" dirty="0">
-                <a:solidFill>
-                  <a:srgbClr val="6B7480"/>
-                </a:solidFill>
-                <a:latin typeface="Calibri" pitchFamily="34" charset="0"/>
-                <a:ea typeface="Calibri" pitchFamily="34" charset="-122"/>
-                <a:cs typeface="Calibri" pitchFamily="34" charset="-120"/>
-              </a:rPr>
-              <a:t>14</a:t>
-            </a:r>
-            <a:endParaRPr lang="en-US" sz="1000" dirty="0"/>
           </a:p>
         </p:txBody>
       </p:sp>
@@ -6348,18 +6569,16 @@
 
 <file path=ppt/slides/slide7.xml><?xml version="1.0" encoding="utf-8"?>
 <p:sld xmlns:a="http://schemas.openxmlformats.org/drawingml/2006/main" xmlns:r="http://schemas.openxmlformats.org/officeDocument/2006/relationships" xmlns:p="http://schemas.openxmlformats.org/presentationml/2006/main">
-  <p:cSld name="Slide 15">
-    <p:bg>
-      <p:bgPr>
-        <a:solidFill>
-          <a:srgbClr val="F4F7F9"/>
-        </a:solidFill>
-        <a:effectLst/>
-      </p:bgPr>
-    </p:bg>
+  <p:cSld>
     <p:spTree>
       <p:nvGrpSpPr>
-        <p:cNvPr id="1" name=""/>
+        <p:cNvPr id="1" name="">
+          <a:extLst>
+            <a:ext uri="{FF2B5EF4-FFF2-40B4-BE49-F238E27FC236}">
+              <a16:creationId xmlns:a16="http://schemas.microsoft.com/office/drawing/2014/main" id="{850E9D10-B62F-CB75-1376-6328F688C396}"/>
+            </a:ext>
+          </a:extLst>
+        </p:cNvPr>
         <p:cNvGrpSpPr/>
         <p:nvPr/>
       </p:nvGrpSpPr>
@@ -6373,14 +6592,96 @@
       </p:grpSpPr>
       <p:sp>
         <p:nvSpPr>
-          <p:cNvPr id="2" name="Text 0"/>
-          <p:cNvSpPr/>
-          <p:nvPr/>
-        </p:nvSpPr>
-        <p:spPr>
-          <a:xfrm>
-            <a:off x="548640" y="411480"/>
-            <a:ext cx="7315200" cy="320040"/>
+          <p:cNvPr id="3" name="Text 1">
+            <a:extLst>
+              <a:ext uri="{FF2B5EF4-FFF2-40B4-BE49-F238E27FC236}">
+                <a16:creationId xmlns:a16="http://schemas.microsoft.com/office/drawing/2014/main" id="{2FBE7B4A-62E1-4685-42F3-4EA5E3D0879C}"/>
+              </a:ext>
+            </a:extLst>
+          </p:cNvPr>
+          <p:cNvSpPr/>
+          <p:nvPr/>
+        </p:nvSpPr>
+        <p:spPr>
+          <a:xfrm>
+            <a:off x="792480" y="1106736"/>
+            <a:ext cx="3238344" cy="822960"/>
+          </a:xfrm>
+          <a:prstGeom prst="rect">
+            <a:avLst/>
+          </a:prstGeom>
+          <a:noFill/>
+          <a:ln/>
+        </p:spPr>
+        <p:txBody>
+          <a:bodyPr wrap="square" rtlCol="0" anchor="ctr"/>
+          <a:lstStyle/>
+          <a:p>
+            <a:r>
+              <a:rPr lang="en-US" sz="3000" b="1" dirty="0" err="1">
+                <a:solidFill>
+                  <a:srgbClr val="21295C"/>
+                </a:solidFill>
+                <a:latin typeface="Cambria" pitchFamily="34" charset="0"/>
+                <a:ea typeface="Cambria" pitchFamily="34" charset="-122"/>
+                <a:cs typeface="Cambria" pitchFamily="34" charset="-120"/>
+              </a:rPr>
+              <a:t>Macroeconomía</a:t>
+            </a:r>
+            <a:endParaRPr lang="en-US" sz="3000" dirty="0"/>
+          </a:p>
+        </p:txBody>
+      </p:sp>
+      <p:sp>
+        <p:nvSpPr>
+          <p:cNvPr id="40" name="Text 38">
+            <a:extLst>
+              <a:ext uri="{FF2B5EF4-FFF2-40B4-BE49-F238E27FC236}">
+                <a16:creationId xmlns:a16="http://schemas.microsoft.com/office/drawing/2014/main" id="{30754C61-50FA-323F-2079-9E09DD3020AA}"/>
+              </a:ext>
+            </a:extLst>
+          </p:cNvPr>
+          <p:cNvSpPr/>
+          <p:nvPr/>
+        </p:nvSpPr>
+        <p:spPr>
+          <a:xfrm>
+            <a:off x="11365992" y="6400800"/>
+            <a:ext cx="548640" cy="274320"/>
+          </a:xfrm>
+          <a:prstGeom prst="rect">
+            <a:avLst/>
+          </a:prstGeom>
+          <a:noFill/>
+          <a:ln/>
+        </p:spPr>
+        <p:txBody>
+          <a:bodyPr wrap="square" rtlCol="0" anchor="ctr"/>
+          <a:lstStyle/>
+          <a:p>
+            <a:pPr marL="0" indent="0" algn="r">
+              <a:buNone/>
+            </a:pPr>
+            <a:endParaRPr lang="en-US" sz="1000" dirty="0"/>
+          </a:p>
+        </p:txBody>
+      </p:sp>
+      <p:sp>
+        <p:nvSpPr>
+          <p:cNvPr id="42" name="Text 1">
+            <a:extLst>
+              <a:ext uri="{FF2B5EF4-FFF2-40B4-BE49-F238E27FC236}">
+                <a16:creationId xmlns:a16="http://schemas.microsoft.com/office/drawing/2014/main" id="{60A2DEE4-C995-21E9-A75F-DC7A523AF9CC}"/>
+              </a:ext>
+            </a:extLst>
+          </p:cNvPr>
+          <p:cNvSpPr/>
+          <p:nvPr/>
+        </p:nvSpPr>
+        <p:spPr>
+          <a:xfrm>
+            <a:off x="579742" y="324457"/>
+            <a:ext cx="10607040" cy="822960"/>
           </a:xfrm>
           <a:prstGeom prst="rect">
             <a:avLst/>
@@ -6396,46 +6697,7 @@
               <a:buNone/>
             </a:pPr>
             <a:r>
-              <a:rPr lang="en-US" sz="1200" b="1" kern="0" spc="200" dirty="0">
-                <a:solidFill>
-                  <a:srgbClr val="1C7293"/>
-                </a:solidFill>
-                <a:latin typeface="Calibri" pitchFamily="34" charset="0"/>
-                <a:ea typeface="Calibri" pitchFamily="34" charset="-122"/>
-                <a:cs typeface="Calibri" pitchFamily="34" charset="-120"/>
-              </a:rPr>
-              <a:t>RESULTADOS</a:t>
-            </a:r>
-            <a:endParaRPr lang="en-US" sz="1200" dirty="0"/>
-          </a:p>
-        </p:txBody>
-      </p:sp>
-      <p:sp>
-        <p:nvSpPr>
-          <p:cNvPr id="3" name="Text 1"/>
-          <p:cNvSpPr/>
-          <p:nvPr/>
-        </p:nvSpPr>
-        <p:spPr>
-          <a:xfrm>
-            <a:off x="548640" y="713232"/>
-            <a:ext cx="10607040" cy="822960"/>
-          </a:xfrm>
-          <a:prstGeom prst="rect">
-            <a:avLst/>
-          </a:prstGeom>
-          <a:noFill/>
-          <a:ln/>
-        </p:spPr>
-        <p:txBody>
-          <a:bodyPr wrap="square" rtlCol="0" anchor="ctr"/>
-          <a:lstStyle/>
-          <a:p>
-            <a:pPr marL="0" indent="0">
-              <a:buNone/>
-            </a:pPr>
-            <a:r>
-              <a:rPr lang="en-US" sz="3000" b="1" dirty="0">
+              <a:rPr lang="en-US" sz="3000" b="1" dirty="0" err="1">
                 <a:solidFill>
                   <a:srgbClr val="21295C"/>
                 </a:solidFill>
@@ -6443,51 +6705,88 @@
                 <a:ea typeface="Cambria" pitchFamily="34" charset="-122"/>
                 <a:cs typeface="Cambria" pitchFamily="34" charset="-120"/>
               </a:rPr>
-              <a:t>El pipeline en cifras</a:t>
+              <a:t>Resultados</a:t>
             </a:r>
             <a:endParaRPr lang="en-US" sz="3000" dirty="0"/>
           </a:p>
         </p:txBody>
       </p:sp>
-      <p:sp>
-        <p:nvSpPr>
-          <p:cNvPr id="4" name="Shape 2"/>
-          <p:cNvSpPr/>
-          <p:nvPr/>
-        </p:nvSpPr>
-        <p:spPr>
-          <a:xfrm>
-            <a:off x="548640" y="1737360"/>
-            <a:ext cx="2615184" cy="1371600"/>
-          </a:xfrm>
-          <a:prstGeom prst="roundRect">
-            <a:avLst>
-              <a:gd name="adj" fmla="val 5333"/>
-            </a:avLst>
-          </a:prstGeom>
-          <a:solidFill>
-            <a:srgbClr val="21295C"/>
-          </a:solidFill>
-          <a:ln/>
-        </p:spPr>
-        <p:txBody>
-          <a:bodyPr/>
-          <a:lstStyle/>
-          <a:p>
-            <a:endParaRPr lang="es-EC"/>
-          </a:p>
-        </p:txBody>
-      </p:sp>
-      <p:sp>
-        <p:nvSpPr>
-          <p:cNvPr id="5" name="Text 3"/>
-          <p:cNvSpPr/>
-          <p:nvPr/>
-        </p:nvSpPr>
-        <p:spPr>
-          <a:xfrm>
-            <a:off x="548640" y="1828800"/>
-            <a:ext cx="2615184" cy="777240"/>
+      <p:pic>
+        <p:nvPicPr>
+          <p:cNvPr id="44" name="Imagen 43">
+            <a:extLst>
+              <a:ext uri="{FF2B5EF4-FFF2-40B4-BE49-F238E27FC236}">
+                <a16:creationId xmlns:a16="http://schemas.microsoft.com/office/drawing/2014/main" id="{B9A61ECB-D296-077C-771E-C41F2F4B60AA}"/>
+              </a:ext>
+            </a:extLst>
+          </p:cNvPr>
+          <p:cNvPicPr>
+            <a:picLocks noChangeAspect="1"/>
+          </p:cNvPicPr>
+          <p:nvPr/>
+        </p:nvPicPr>
+        <p:blipFill>
+          <a:blip r:embed="rId3"/>
+          <a:stretch>
+            <a:fillRect/>
+          </a:stretch>
+        </p:blipFill>
+        <p:spPr>
+          <a:xfrm>
+            <a:off x="770759" y="1776737"/>
+            <a:ext cx="4325576" cy="4756806"/>
+          </a:xfrm>
+          <a:prstGeom prst="rect">
+            <a:avLst/>
+          </a:prstGeom>
+        </p:spPr>
+      </p:pic>
+      <p:pic>
+        <p:nvPicPr>
+          <p:cNvPr id="46" name="Imagen 45">
+            <a:extLst>
+              <a:ext uri="{FF2B5EF4-FFF2-40B4-BE49-F238E27FC236}">
+                <a16:creationId xmlns:a16="http://schemas.microsoft.com/office/drawing/2014/main" id="{9210189A-5D53-883C-988D-C8D96840633E}"/>
+              </a:ext>
+            </a:extLst>
+          </p:cNvPr>
+          <p:cNvPicPr>
+            <a:picLocks noChangeAspect="1"/>
+          </p:cNvPicPr>
+          <p:nvPr/>
+        </p:nvPicPr>
+        <p:blipFill>
+          <a:blip r:embed="rId4"/>
+          <a:stretch>
+            <a:fillRect/>
+          </a:stretch>
+        </p:blipFill>
+        <p:spPr>
+          <a:xfrm>
+            <a:off x="5309073" y="1776737"/>
+            <a:ext cx="5458454" cy="4756803"/>
+          </a:xfrm>
+          <a:prstGeom prst="rect">
+            <a:avLst/>
+          </a:prstGeom>
+        </p:spPr>
+      </p:pic>
+      <p:sp>
+        <p:nvSpPr>
+          <p:cNvPr id="50" name="Text 1">
+            <a:extLst>
+              <a:ext uri="{FF2B5EF4-FFF2-40B4-BE49-F238E27FC236}">
+                <a16:creationId xmlns:a16="http://schemas.microsoft.com/office/drawing/2014/main" id="{1DFD7587-15BA-C227-151F-84595804C263}"/>
+              </a:ext>
+            </a:extLst>
+          </p:cNvPr>
+          <p:cNvSpPr/>
+          <p:nvPr/>
+        </p:nvSpPr>
+        <p:spPr>
+          <a:xfrm>
+            <a:off x="5309072" y="1050597"/>
+            <a:ext cx="3984217" cy="822960"/>
           </a:xfrm>
           <a:prstGeom prst="rect">
             <a:avLst/>
@@ -6499,278 +6798,38 @@
           <a:bodyPr wrap="square" rtlCol="0" anchor="ctr"/>
           <a:lstStyle/>
           <a:p>
-            <a:pPr marL="0" indent="0" algn="ctr">
-              <a:buNone/>
-            </a:pPr>
-            <a:r>
-              <a:rPr lang="en-US" sz="2600" b="1" dirty="0">
-                <a:solidFill>
-                  <a:srgbClr val="FFFFFF"/>
+            <a:r>
+              <a:rPr lang="en-US" sz="3000" b="1" dirty="0" err="1">
+                <a:solidFill>
+                  <a:srgbClr val="21295C"/>
                 </a:solidFill>
                 <a:latin typeface="Cambria" pitchFamily="34" charset="0"/>
                 <a:ea typeface="Cambria" pitchFamily="34" charset="-122"/>
                 <a:cs typeface="Cambria" pitchFamily="34" charset="-120"/>
               </a:rPr>
-              <a:t>912,741</a:t>
-            </a:r>
-            <a:endParaRPr lang="en-US" sz="2600" dirty="0"/>
-          </a:p>
-        </p:txBody>
-      </p:sp>
-      <p:sp>
-        <p:nvSpPr>
-          <p:cNvPr id="6" name="Text 4"/>
-          <p:cNvSpPr/>
-          <p:nvPr/>
-        </p:nvSpPr>
-        <p:spPr>
-          <a:xfrm>
-            <a:off x="658368" y="2560320"/>
-            <a:ext cx="2395728" cy="457200"/>
-          </a:xfrm>
-          <a:prstGeom prst="rect">
-            <a:avLst/>
-          </a:prstGeom>
-          <a:noFill/>
-          <a:ln/>
-        </p:spPr>
-        <p:txBody>
-          <a:bodyPr wrap="square" rtlCol="0" anchor="ctr"/>
-          <a:lstStyle/>
-          <a:p>
-            <a:pPr marL="0" indent="0" algn="ctr">
-              <a:buNone/>
-            </a:pPr>
-            <a:r>
-              <a:rPr lang="en-US" sz="1000" dirty="0">
-                <a:solidFill>
-                  <a:srgbClr val="CADCFC"/>
-                </a:solidFill>
-                <a:latin typeface="Calibri" pitchFamily="34" charset="0"/>
-                <a:ea typeface="Calibri" pitchFamily="34" charset="-122"/>
-                <a:cs typeface="Calibri" pitchFamily="34" charset="-120"/>
-              </a:rPr>
-              <a:t>Registros Silver (Reto 2)</a:t>
-            </a:r>
-            <a:endParaRPr lang="en-US" sz="1000" dirty="0"/>
-          </a:p>
-        </p:txBody>
-      </p:sp>
-      <p:sp>
-        <p:nvSpPr>
-          <p:cNvPr id="10" name="Shape 8"/>
-          <p:cNvSpPr/>
-          <p:nvPr/>
-        </p:nvSpPr>
-        <p:spPr>
-          <a:xfrm>
-            <a:off x="6217920" y="1737360"/>
-            <a:ext cx="2615184" cy="1371600"/>
-          </a:xfrm>
-          <a:prstGeom prst="roundRect">
-            <a:avLst>
-              <a:gd name="adj" fmla="val 5333"/>
-            </a:avLst>
-          </a:prstGeom>
-          <a:solidFill>
-            <a:srgbClr val="21295C"/>
-          </a:solidFill>
-          <a:ln/>
-        </p:spPr>
-        <p:txBody>
-          <a:bodyPr/>
-          <a:lstStyle/>
-          <a:p>
-            <a:endParaRPr lang="es-EC"/>
-          </a:p>
-        </p:txBody>
-      </p:sp>
-      <p:sp>
-        <p:nvSpPr>
-          <p:cNvPr id="11" name="Text 9"/>
-          <p:cNvSpPr/>
-          <p:nvPr/>
-        </p:nvSpPr>
-        <p:spPr>
-          <a:xfrm>
-            <a:off x="6217920" y="1828800"/>
-            <a:ext cx="2615184" cy="777240"/>
-          </a:xfrm>
-          <a:prstGeom prst="rect">
-            <a:avLst/>
-          </a:prstGeom>
-          <a:noFill/>
-          <a:ln/>
-        </p:spPr>
-        <p:txBody>
-          <a:bodyPr wrap="square" rtlCol="0" anchor="ctr"/>
-          <a:lstStyle/>
-          <a:p>
-            <a:pPr marL="0" indent="0" algn="ctr">
-              <a:buNone/>
-            </a:pPr>
-            <a:r>
-              <a:rPr lang="en-US" sz="2600" b="1" dirty="0">
-                <a:solidFill>
-                  <a:srgbClr val="FFFFFF"/>
+              <a:t>Producción</a:t>
+            </a:r>
+            <a:r>
+              <a:rPr lang="en-US" sz="3000" b="1" dirty="0">
+                <a:solidFill>
+                  <a:srgbClr val="21295C"/>
                 </a:solidFill>
                 <a:latin typeface="Cambria" pitchFamily="34" charset="0"/>
                 <a:ea typeface="Cambria" pitchFamily="34" charset="-122"/>
                 <a:cs typeface="Cambria" pitchFamily="34" charset="-120"/>
               </a:rPr>
-              <a:t>12</a:t>
-            </a:r>
-            <a:endParaRPr lang="en-US" sz="2600" dirty="0"/>
-          </a:p>
-        </p:txBody>
-      </p:sp>
-      <p:sp>
-        <p:nvSpPr>
-          <p:cNvPr id="12" name="Text 10"/>
-          <p:cNvSpPr/>
-          <p:nvPr/>
-        </p:nvSpPr>
-        <p:spPr>
-          <a:xfrm>
-            <a:off x="6327648" y="2560320"/>
-            <a:ext cx="2395728" cy="457200"/>
-          </a:xfrm>
-          <a:prstGeom prst="rect">
-            <a:avLst/>
-          </a:prstGeom>
-          <a:noFill/>
-          <a:ln/>
-        </p:spPr>
-        <p:txBody>
-          <a:bodyPr wrap="square" rtlCol="0" anchor="ctr"/>
-          <a:lstStyle/>
-          <a:p>
-            <a:pPr marL="0" indent="0" algn="ctr">
-              <a:buNone/>
-            </a:pPr>
-            <a:r>
-              <a:rPr lang="en-US" sz="1000" dirty="0">
-                <a:solidFill>
-                  <a:srgbClr val="CADCFC"/>
-                </a:solidFill>
-                <a:latin typeface="Calibri" pitchFamily="34" charset="0"/>
-                <a:ea typeface="Calibri" pitchFamily="34" charset="-122"/>
-                <a:cs typeface="Calibri" pitchFamily="34" charset="-120"/>
-              </a:rPr>
-              <a:t>Tablas Silver normalizadas</a:t>
-            </a:r>
-            <a:endParaRPr lang="en-US" sz="1000" dirty="0"/>
-          </a:p>
-        </p:txBody>
-      </p:sp>
-      <p:sp>
-        <p:nvSpPr>
-          <p:cNvPr id="13" name="Shape 11"/>
-          <p:cNvSpPr/>
-          <p:nvPr/>
-        </p:nvSpPr>
-        <p:spPr>
-          <a:xfrm>
-            <a:off x="9052560" y="1737360"/>
-            <a:ext cx="2615184" cy="1371600"/>
-          </a:xfrm>
-          <a:prstGeom prst="roundRect">
-            <a:avLst>
-              <a:gd name="adj" fmla="val 5333"/>
-            </a:avLst>
-          </a:prstGeom>
-          <a:solidFill>
-            <a:srgbClr val="21295C"/>
-          </a:solidFill>
-          <a:ln/>
-        </p:spPr>
-        <p:txBody>
-          <a:bodyPr/>
-          <a:lstStyle/>
-          <a:p>
-            <a:endParaRPr lang="es-EC"/>
-          </a:p>
-        </p:txBody>
-      </p:sp>
-      <p:sp>
-        <p:nvSpPr>
-          <p:cNvPr id="14" name="Text 12"/>
-          <p:cNvSpPr/>
-          <p:nvPr/>
-        </p:nvSpPr>
-        <p:spPr>
-          <a:xfrm>
-            <a:off x="9052560" y="1828800"/>
-            <a:ext cx="2615184" cy="777240"/>
-          </a:xfrm>
-          <a:prstGeom prst="rect">
-            <a:avLst/>
-          </a:prstGeom>
-          <a:noFill/>
-          <a:ln/>
-        </p:spPr>
-        <p:txBody>
-          <a:bodyPr wrap="square" rtlCol="0" anchor="ctr"/>
-          <a:lstStyle/>
-          <a:p>
-            <a:pPr marL="0" indent="0" algn="ctr">
-              <a:buNone/>
-            </a:pPr>
-            <a:r>
-              <a:rPr lang="en-US" sz="2600" b="1" dirty="0">
-                <a:solidFill>
-                  <a:srgbClr val="FFFFFF"/>
-                </a:solidFill>
-                <a:latin typeface="Cambria" pitchFamily="34" charset="0"/>
-                <a:ea typeface="Cambria" pitchFamily="34" charset="-122"/>
-                <a:cs typeface="Cambria" pitchFamily="34" charset="-120"/>
-              </a:rPr>
-              <a:t>6</a:t>
-            </a:r>
-            <a:endParaRPr lang="en-US" sz="2600" dirty="0"/>
-          </a:p>
-        </p:txBody>
-      </p:sp>
-      <p:sp>
-        <p:nvSpPr>
-          <p:cNvPr id="15" name="Text 13"/>
-          <p:cNvSpPr/>
-          <p:nvPr/>
-        </p:nvSpPr>
-        <p:spPr>
-          <a:xfrm>
-            <a:off x="9162288" y="2560320"/>
-            <a:ext cx="2395728" cy="457200"/>
-          </a:xfrm>
-          <a:prstGeom prst="rect">
-            <a:avLst/>
-          </a:prstGeom>
-          <a:noFill/>
-          <a:ln/>
-        </p:spPr>
-        <p:txBody>
-          <a:bodyPr wrap="square" rtlCol="0" anchor="ctr"/>
-          <a:lstStyle/>
-          <a:p>
-            <a:pPr marL="0" indent="0" algn="ctr">
-              <a:buNone/>
-            </a:pPr>
-            <a:r>
-              <a:rPr lang="en-US" sz="1000" dirty="0">
-                <a:solidFill>
-                  <a:srgbClr val="CADCFC"/>
-                </a:solidFill>
-                <a:latin typeface="Calibri" pitchFamily="34" charset="0"/>
-                <a:ea typeface="Calibri" pitchFamily="34" charset="-122"/>
-                <a:cs typeface="Calibri" pitchFamily="34" charset="-120"/>
-              </a:rPr>
-              <a:t>Vistas analíticas Gold</a:t>
-            </a:r>
-            <a:endParaRPr lang="en-US" sz="1000" dirty="0"/>
+              <a:t> y Laboral</a:t>
+            </a:r>
+            <a:endParaRPr lang="en-US" sz="3000" dirty="0"/>
           </a:p>
         </p:txBody>
       </p:sp>
     </p:spTree>
+    <p:extLst>
+      <p:ext uri="{BB962C8B-B14F-4D97-AF65-F5344CB8AC3E}">
+        <p14:creationId xmlns:p14="http://schemas.microsoft.com/office/powerpoint/2010/main" val="2976715651"/>
+      </p:ext>
+    </p:extLst>
   </p:cSld>
   <p:clrMapOvr>
     <a:masterClrMapping/>
@@ -6779,6 +6838,204 @@
 </file>
 
 <file path=ppt/slides/slide8.xml><?xml version="1.0" encoding="utf-8"?>
+<p:sld xmlns:a="http://schemas.openxmlformats.org/drawingml/2006/main" xmlns:r="http://schemas.openxmlformats.org/officeDocument/2006/relationships" xmlns:p="http://schemas.openxmlformats.org/presentationml/2006/main">
+  <p:cSld>
+    <p:spTree>
+      <p:nvGrpSpPr>
+        <p:cNvPr id="1" name="">
+          <a:extLst>
+            <a:ext uri="{FF2B5EF4-FFF2-40B4-BE49-F238E27FC236}">
+              <a16:creationId xmlns:a16="http://schemas.microsoft.com/office/drawing/2014/main" id="{DF277E79-840B-0D9D-6209-F77C6B4855A7}"/>
+            </a:ext>
+          </a:extLst>
+        </p:cNvPr>
+        <p:cNvGrpSpPr/>
+        <p:nvPr/>
+      </p:nvGrpSpPr>
+      <p:grpSpPr>
+        <a:xfrm>
+          <a:off x="0" y="0"/>
+          <a:ext cx="0" cy="0"/>
+          <a:chOff x="0" y="0"/>
+          <a:chExt cx="0" cy="0"/>
+        </a:xfrm>
+      </p:grpSpPr>
+      <p:sp>
+        <p:nvSpPr>
+          <p:cNvPr id="3" name="Text 1">
+            <a:extLst>
+              <a:ext uri="{FF2B5EF4-FFF2-40B4-BE49-F238E27FC236}">
+                <a16:creationId xmlns:a16="http://schemas.microsoft.com/office/drawing/2014/main" id="{D263334B-0019-BBD9-1927-A17C731095A3}"/>
+              </a:ext>
+            </a:extLst>
+          </p:cNvPr>
+          <p:cNvSpPr/>
+          <p:nvPr/>
+        </p:nvSpPr>
+        <p:spPr>
+          <a:xfrm>
+            <a:off x="792480" y="1106736"/>
+            <a:ext cx="10607040" cy="822960"/>
+          </a:xfrm>
+          <a:prstGeom prst="rect">
+            <a:avLst/>
+          </a:prstGeom>
+          <a:noFill/>
+          <a:ln/>
+        </p:spPr>
+        <p:txBody>
+          <a:bodyPr wrap="square" rtlCol="0" anchor="ctr"/>
+          <a:lstStyle/>
+          <a:p>
+            <a:r>
+              <a:rPr lang="en-US" sz="3000" b="1" dirty="0" err="1">
+                <a:solidFill>
+                  <a:srgbClr val="21295C"/>
+                </a:solidFill>
+                <a:latin typeface="Cambria" pitchFamily="34" charset="0"/>
+                <a:ea typeface="Cambria" pitchFamily="34" charset="-122"/>
+                <a:cs typeface="Cambria" pitchFamily="34" charset="-120"/>
+              </a:rPr>
+              <a:t>Bachilleres</a:t>
+            </a:r>
+            <a:r>
+              <a:rPr lang="en-US" sz="3000" b="1" dirty="0">
+                <a:solidFill>
+                  <a:srgbClr val="21295C"/>
+                </a:solidFill>
+                <a:latin typeface="Cambria" pitchFamily="34" charset="0"/>
+                <a:ea typeface="Cambria" pitchFamily="34" charset="-122"/>
+                <a:cs typeface="Cambria" pitchFamily="34" charset="-120"/>
+              </a:rPr>
+              <a:t> y Empresas</a:t>
+            </a:r>
+            <a:endParaRPr lang="en-US" sz="3000" dirty="0"/>
+          </a:p>
+        </p:txBody>
+      </p:sp>
+      <p:sp>
+        <p:nvSpPr>
+          <p:cNvPr id="40" name="Text 38">
+            <a:extLst>
+              <a:ext uri="{FF2B5EF4-FFF2-40B4-BE49-F238E27FC236}">
+                <a16:creationId xmlns:a16="http://schemas.microsoft.com/office/drawing/2014/main" id="{07767508-E449-AAFC-9640-5A337624B5FC}"/>
+              </a:ext>
+            </a:extLst>
+          </p:cNvPr>
+          <p:cNvSpPr/>
+          <p:nvPr/>
+        </p:nvSpPr>
+        <p:spPr>
+          <a:xfrm>
+            <a:off x="11365992" y="6400800"/>
+            <a:ext cx="548640" cy="274320"/>
+          </a:xfrm>
+          <a:prstGeom prst="rect">
+            <a:avLst/>
+          </a:prstGeom>
+          <a:noFill/>
+          <a:ln/>
+        </p:spPr>
+        <p:txBody>
+          <a:bodyPr wrap="square" rtlCol="0" anchor="ctr"/>
+          <a:lstStyle/>
+          <a:p>
+            <a:pPr marL="0" indent="0" algn="r">
+              <a:buNone/>
+            </a:pPr>
+            <a:endParaRPr lang="en-US" sz="1000" dirty="0"/>
+          </a:p>
+        </p:txBody>
+      </p:sp>
+      <p:sp>
+        <p:nvSpPr>
+          <p:cNvPr id="42" name="Text 1">
+            <a:extLst>
+              <a:ext uri="{FF2B5EF4-FFF2-40B4-BE49-F238E27FC236}">
+                <a16:creationId xmlns:a16="http://schemas.microsoft.com/office/drawing/2014/main" id="{92755AC6-F44E-353D-EC55-23BCF6DAD8B6}"/>
+              </a:ext>
+            </a:extLst>
+          </p:cNvPr>
+          <p:cNvSpPr/>
+          <p:nvPr/>
+        </p:nvSpPr>
+        <p:spPr>
+          <a:xfrm>
+            <a:off x="579742" y="324457"/>
+            <a:ext cx="10607040" cy="822960"/>
+          </a:xfrm>
+          <a:prstGeom prst="rect">
+            <a:avLst/>
+          </a:prstGeom>
+          <a:noFill/>
+          <a:ln/>
+        </p:spPr>
+        <p:txBody>
+          <a:bodyPr wrap="square" rtlCol="0" anchor="ctr"/>
+          <a:lstStyle/>
+          <a:p>
+            <a:pPr marL="0" indent="0">
+              <a:buNone/>
+            </a:pPr>
+            <a:r>
+              <a:rPr lang="en-US" sz="3000" b="1" dirty="0" err="1">
+                <a:solidFill>
+                  <a:srgbClr val="21295C"/>
+                </a:solidFill>
+                <a:latin typeface="Cambria" pitchFamily="34" charset="0"/>
+                <a:ea typeface="Cambria" pitchFamily="34" charset="-122"/>
+                <a:cs typeface="Cambria" pitchFamily="34" charset="-120"/>
+              </a:rPr>
+              <a:t>Resultados</a:t>
+            </a:r>
+            <a:endParaRPr lang="en-US" sz="3000" dirty="0"/>
+          </a:p>
+        </p:txBody>
+      </p:sp>
+      <p:pic>
+        <p:nvPicPr>
+          <p:cNvPr id="4" name="Imagen 3">
+            <a:extLst>
+              <a:ext uri="{FF2B5EF4-FFF2-40B4-BE49-F238E27FC236}">
+                <a16:creationId xmlns:a16="http://schemas.microsoft.com/office/drawing/2014/main" id="{3A36F4E2-B347-F5A0-7231-96B1D9DA3072}"/>
+              </a:ext>
+            </a:extLst>
+          </p:cNvPr>
+          <p:cNvPicPr>
+            <a:picLocks noChangeAspect="1"/>
+          </p:cNvPicPr>
+          <p:nvPr/>
+        </p:nvPicPr>
+        <p:blipFill>
+          <a:blip r:embed="rId3"/>
+          <a:stretch>
+            <a:fillRect/>
+          </a:stretch>
+        </p:blipFill>
+        <p:spPr>
+          <a:xfrm>
+            <a:off x="579742" y="1986641"/>
+            <a:ext cx="9838136" cy="4546902"/>
+          </a:xfrm>
+          <a:prstGeom prst="rect">
+            <a:avLst/>
+          </a:prstGeom>
+        </p:spPr>
+      </p:pic>
+    </p:spTree>
+    <p:extLst>
+      <p:ext uri="{BB962C8B-B14F-4D97-AF65-F5344CB8AC3E}">
+        <p14:creationId xmlns:p14="http://schemas.microsoft.com/office/powerpoint/2010/main" val="1640464297"/>
+      </p:ext>
+    </p:extLst>
+  </p:cSld>
+  <p:clrMapOvr>
+    <a:masterClrMapping/>
+  </p:clrMapOvr>
+</p:sld>
+</file>
+
+<file path=ppt/slides/slide9.xml><?xml version="1.0" encoding="utf-8"?>
 <p:sld xmlns:a="http://schemas.openxmlformats.org/drawingml/2006/main" xmlns:r="http://schemas.openxmlformats.org/officeDocument/2006/relationships" xmlns:p="http://schemas.openxmlformats.org/presentationml/2006/main">
   <p:cSld name="Slide 18">
     <p:bg>
@@ -6968,7 +7225,73 @@
                 <a:ea typeface="Calibri" pitchFamily="34" charset="-122"/>
                 <a:cs typeface="Calibri" pitchFamily="34" charset="-120"/>
               </a:rPr>
-              <a:t>Se cumplieron todos los objetivos: 912,741 registros Silver + 442,716 registros AMIE, y 6 vistas Gold que responden preguntas estratégicas de la UTPL.</a:t>
+              <a:t>Se cumplieron todos los objetivos: </a:t>
+            </a:r>
+            <a:r>
+              <a:rPr lang="en-US" sz="1250" dirty="0" err="1">
+                <a:solidFill>
+                  <a:srgbClr val="FFFFFF"/>
+                </a:solidFill>
+                <a:latin typeface="Calibri" pitchFamily="34" charset="0"/>
+                <a:ea typeface="Calibri" pitchFamily="34" charset="-122"/>
+                <a:cs typeface="Calibri" pitchFamily="34" charset="-120"/>
+              </a:rPr>
+              <a:t>registros</a:t>
+            </a:r>
+            <a:r>
+              <a:rPr lang="en-US" sz="1250" dirty="0">
+                <a:solidFill>
+                  <a:srgbClr val="FFFFFF"/>
+                </a:solidFill>
+                <a:latin typeface="Calibri" pitchFamily="34" charset="0"/>
+                <a:ea typeface="Calibri" pitchFamily="34" charset="-122"/>
+                <a:cs typeface="Calibri" pitchFamily="34" charset="-120"/>
+              </a:rPr>
+              <a:t> de las </a:t>
+            </a:r>
+            <a:r>
+              <a:rPr lang="en-US" sz="1250" dirty="0" err="1">
+                <a:solidFill>
+                  <a:srgbClr val="FFFFFF"/>
+                </a:solidFill>
+                <a:latin typeface="Calibri" pitchFamily="34" charset="0"/>
+                <a:ea typeface="Calibri" pitchFamily="34" charset="-122"/>
+                <a:cs typeface="Calibri" pitchFamily="34" charset="-120"/>
+              </a:rPr>
+              <a:t>diferentes</a:t>
+            </a:r>
+            <a:r>
+              <a:rPr lang="en-US" sz="1250" dirty="0">
+                <a:solidFill>
+                  <a:srgbClr val="FFFFFF"/>
+                </a:solidFill>
+                <a:latin typeface="Calibri" pitchFamily="34" charset="0"/>
+                <a:ea typeface="Calibri" pitchFamily="34" charset="-122"/>
+                <a:cs typeface="Calibri" pitchFamily="34" charset="-120"/>
+              </a:rPr>
+              <a:t> </a:t>
+            </a:r>
+            <a:r>
+              <a:rPr lang="en-US" sz="1250" dirty="0" err="1">
+                <a:solidFill>
+                  <a:srgbClr val="FFFFFF"/>
+                </a:solidFill>
+                <a:latin typeface="Calibri" pitchFamily="34" charset="0"/>
+                <a:ea typeface="Calibri" pitchFamily="34" charset="-122"/>
+                <a:cs typeface="Calibri" pitchFamily="34" charset="-120"/>
+              </a:rPr>
+              <a:t>fuentes</a:t>
+            </a:r>
+            <a:r>
+              <a:rPr lang="en-US" sz="1250" dirty="0">
+                <a:solidFill>
+                  <a:srgbClr val="FFFFFF"/>
+                </a:solidFill>
+                <a:latin typeface="Calibri" pitchFamily="34" charset="0"/>
+                <a:ea typeface="Calibri" pitchFamily="34" charset="-122"/>
+                <a:cs typeface="Calibri" pitchFamily="34" charset="-120"/>
+              </a:rPr>
+              <a:t>, y 6 vistas Gold que responden preguntas estratégicas de la UTPL.</a:t>
             </a:r>
             <a:endParaRPr lang="en-US" sz="1250" dirty="0"/>
           </a:p>
@@ -7126,8 +7449,8 @@
         </p:nvSpPr>
         <p:spPr>
           <a:xfrm>
-            <a:off x="1188720" y="3511296"/>
-            <a:ext cx="10332720" cy="822960"/>
+            <a:off x="1188720" y="3675888"/>
+            <a:ext cx="10332720" cy="457200"/>
           </a:xfrm>
           <a:prstGeom prst="rect">
             <a:avLst/>
@@ -7146,7 +7469,7 @@
               <a:buNone/>
             </a:pPr>
             <a:r>
-              <a:rPr lang="en-US" sz="1250" dirty="0">
+              <a:rPr lang="en-US" sz="1250" dirty="0" err="1">
                 <a:solidFill>
                   <a:srgbClr val="FFFFFF"/>
                 </a:solidFill>
@@ -7154,7 +7477,18 @@
                 <a:ea typeface="Calibri" pitchFamily="34" charset="-122"/>
                 <a:cs typeface="Calibri" pitchFamily="34" charset="-120"/>
               </a:rPr>
-              <a:t>El Registry Pattern garantiza escalabilidad real: nuevas fuentes se integran sin modificar el orquestador principal.</a:t>
+              <a:t>Escalabilidad</a:t>
+            </a:r>
+            <a:r>
+              <a:rPr lang="en-US" sz="1250" dirty="0">
+                <a:solidFill>
+                  <a:srgbClr val="FFFFFF"/>
+                </a:solidFill>
+                <a:latin typeface="Calibri" pitchFamily="34" charset="0"/>
+                <a:ea typeface="Calibri" pitchFamily="34" charset="-122"/>
+                <a:cs typeface="Calibri" pitchFamily="34" charset="-120"/>
+              </a:rPr>
+              <a:t>: nuevas fuentes se integran sin modificar el orquestador principal.</a:t>
             </a:r>
             <a:endParaRPr lang="en-US" sz="1250" dirty="0"/>
           </a:p>
@@ -7220,7 +7554,7 @@
         <p:spPr>
           <a:xfrm>
             <a:off x="1188720" y="4389120"/>
-            <a:ext cx="10332720" cy="822960"/>
+            <a:ext cx="10332720" cy="649411"/>
           </a:xfrm>
           <a:prstGeom prst="rect">
             <a:avLst/>
@@ -7247,7 +7581,73 @@
                 <a:ea typeface="Calibri" pitchFamily="34" charset="-122"/>
                 <a:cs typeface="Calibri" pitchFamily="34" charset="-120"/>
               </a:rPr>
-              <a:t>Los datos heterogéneos requieren estrategias adaptativas: detección dinámica de encabezados en lugar de estructuras fijas.</a:t>
+              <a:t>Los datos heterogéneos requieren </a:t>
+            </a:r>
+            <a:r>
+              <a:rPr lang="en-US" sz="1250" dirty="0" err="1">
+                <a:solidFill>
+                  <a:srgbClr val="FFFFFF"/>
+                </a:solidFill>
+                <a:latin typeface="Calibri" pitchFamily="34" charset="0"/>
+                <a:ea typeface="Calibri" pitchFamily="34" charset="-122"/>
+                <a:cs typeface="Calibri" pitchFamily="34" charset="-120"/>
+              </a:rPr>
+              <a:t>estrategias</a:t>
+            </a:r>
+            <a:r>
+              <a:rPr lang="en-US" sz="1250" dirty="0">
+                <a:solidFill>
+                  <a:srgbClr val="FFFFFF"/>
+                </a:solidFill>
+                <a:latin typeface="Calibri" pitchFamily="34" charset="0"/>
+                <a:ea typeface="Calibri" pitchFamily="34" charset="-122"/>
+                <a:cs typeface="Calibri" pitchFamily="34" charset="-120"/>
+              </a:rPr>
+              <a:t> </a:t>
+            </a:r>
+            <a:r>
+              <a:rPr lang="en-US" sz="1250" dirty="0" err="1">
+                <a:solidFill>
+                  <a:srgbClr val="FFFFFF"/>
+                </a:solidFill>
+                <a:latin typeface="Calibri" pitchFamily="34" charset="0"/>
+                <a:ea typeface="Calibri" pitchFamily="34" charset="-122"/>
+                <a:cs typeface="Calibri" pitchFamily="34" charset="-120"/>
+              </a:rPr>
+              <a:t>adaptativas</a:t>
+            </a:r>
+            <a:r>
+              <a:rPr lang="en-US" sz="1250" dirty="0">
+                <a:solidFill>
+                  <a:srgbClr val="FFFFFF"/>
+                </a:solidFill>
+                <a:latin typeface="Calibri" pitchFamily="34" charset="0"/>
+                <a:ea typeface="Calibri" pitchFamily="34" charset="-122"/>
+                <a:cs typeface="Calibri" pitchFamily="34" charset="-120"/>
+              </a:rPr>
+              <a:t> </a:t>
+            </a:r>
+            <a:r>
+              <a:rPr lang="en-US" sz="1250" dirty="0" err="1">
+                <a:solidFill>
+                  <a:srgbClr val="FFFFFF"/>
+                </a:solidFill>
+                <a:latin typeface="Calibri" pitchFamily="34" charset="0"/>
+                <a:ea typeface="Calibri" pitchFamily="34" charset="-122"/>
+                <a:cs typeface="Calibri" pitchFamily="34" charset="-120"/>
+              </a:rPr>
+              <a:t>en</a:t>
+            </a:r>
+            <a:r>
+              <a:rPr lang="en-US" sz="1250" dirty="0">
+                <a:solidFill>
+                  <a:srgbClr val="FFFFFF"/>
+                </a:solidFill>
+                <a:latin typeface="Calibri" pitchFamily="34" charset="0"/>
+                <a:ea typeface="Calibri" pitchFamily="34" charset="-122"/>
+                <a:cs typeface="Calibri" pitchFamily="34" charset="-120"/>
+              </a:rPr>
+              <a:t> lugar de estructuras fijas.</a:t>
             </a:r>
             <a:endParaRPr lang="en-US" sz="1250" dirty="0"/>
           </a:p>
@@ -7382,303 +7782,6 @@
               <a:t>18</a:t>
             </a:r>
             <a:endParaRPr lang="en-US" sz="1000" dirty="0"/>
-          </a:p>
-        </p:txBody>
-      </p:sp>
-    </p:spTree>
-  </p:cSld>
-  <p:clrMapOvr>
-    <a:masterClrMapping/>
-  </p:clrMapOvr>
-</p:sld>
-</file>
-
-<file path=ppt/slides/slide9.xml><?xml version="1.0" encoding="utf-8"?>
-<p:sld xmlns:a="http://schemas.openxmlformats.org/drawingml/2006/main" xmlns:r="http://schemas.openxmlformats.org/officeDocument/2006/relationships" xmlns:p="http://schemas.openxmlformats.org/presentationml/2006/main">
-  <p:cSld name="Slide 19">
-    <p:bg>
-      <p:bgPr>
-        <a:solidFill>
-          <a:srgbClr val="21295C"/>
-        </a:solidFill>
-        <a:effectLst/>
-      </p:bgPr>
-    </p:bg>
-    <p:spTree>
-      <p:nvGrpSpPr>
-        <p:cNvPr id="1" name=""/>
-        <p:cNvGrpSpPr/>
-        <p:nvPr/>
-      </p:nvGrpSpPr>
-      <p:grpSpPr>
-        <a:xfrm>
-          <a:off x="0" y="0"/>
-          <a:ext cx="0" cy="0"/>
-          <a:chOff x="0" y="0"/>
-          <a:chExt cx="0" cy="0"/>
-        </a:xfrm>
-      </p:grpSpPr>
-      <p:sp>
-        <p:nvSpPr>
-          <p:cNvPr id="2" name="Shape 0"/>
-          <p:cNvSpPr/>
-          <p:nvPr/>
-        </p:nvSpPr>
-        <p:spPr>
-          <a:xfrm>
-            <a:off x="0" y="0"/>
-            <a:ext cx="12188952" cy="6858000"/>
-          </a:xfrm>
-          <a:prstGeom prst="rect">
-            <a:avLst/>
-          </a:prstGeom>
-          <a:solidFill>
-            <a:srgbClr val="21295C"/>
-          </a:solidFill>
-          <a:ln/>
-        </p:spPr>
-        <p:txBody>
-          <a:bodyPr/>
-          <a:lstStyle/>
-          <a:p>
-            <a:endParaRPr lang="es-EC"/>
-          </a:p>
-        </p:txBody>
-      </p:sp>
-      <p:sp>
-        <p:nvSpPr>
-          <p:cNvPr id="3" name="Shape 1"/>
-          <p:cNvSpPr/>
-          <p:nvPr/>
-        </p:nvSpPr>
-        <p:spPr>
-          <a:xfrm>
-            <a:off x="0" y="0"/>
-            <a:ext cx="3959352" cy="2194560"/>
-          </a:xfrm>
-          <a:prstGeom prst="rect">
-            <a:avLst/>
-          </a:prstGeom>
-          <a:solidFill>
-            <a:srgbClr val="065A82"/>
-          </a:solidFill>
-          <a:ln/>
-        </p:spPr>
-        <p:txBody>
-          <a:bodyPr/>
-          <a:lstStyle/>
-          <a:p>
-            <a:endParaRPr lang="es-EC"/>
-          </a:p>
-        </p:txBody>
-      </p:sp>
-      <p:sp>
-        <p:nvSpPr>
-          <p:cNvPr id="4" name="Shape 2"/>
-          <p:cNvSpPr/>
-          <p:nvPr/>
-        </p:nvSpPr>
-        <p:spPr>
-          <a:xfrm>
-            <a:off x="0" y="2148840"/>
-            <a:ext cx="3410712" cy="2194560"/>
-          </a:xfrm>
-          <a:prstGeom prst="rect">
-            <a:avLst/>
-          </a:prstGeom>
-          <a:solidFill>
-            <a:srgbClr val="1C7293"/>
-          </a:solidFill>
-          <a:ln/>
-        </p:spPr>
-        <p:txBody>
-          <a:bodyPr/>
-          <a:lstStyle/>
-          <a:p>
-            <a:endParaRPr lang="es-EC"/>
-          </a:p>
-        </p:txBody>
-      </p:sp>
-      <p:sp>
-        <p:nvSpPr>
-          <p:cNvPr id="5" name="Shape 3"/>
-          <p:cNvSpPr/>
-          <p:nvPr/>
-        </p:nvSpPr>
-        <p:spPr>
-          <a:xfrm>
-            <a:off x="0" y="4297680"/>
-            <a:ext cx="2862072" cy="2194560"/>
-          </a:xfrm>
-          <a:prstGeom prst="rect">
-            <a:avLst/>
-          </a:prstGeom>
-          <a:solidFill>
-            <a:srgbClr val="5FB3A3"/>
-          </a:solidFill>
-          <a:ln/>
-        </p:spPr>
-        <p:txBody>
-          <a:bodyPr/>
-          <a:lstStyle/>
-          <a:p>
-            <a:endParaRPr lang="es-EC"/>
-          </a:p>
-        </p:txBody>
-      </p:sp>
-      <p:sp>
-        <p:nvSpPr>
-          <p:cNvPr id="6" name="Text 4"/>
-          <p:cNvSpPr/>
-          <p:nvPr/>
-        </p:nvSpPr>
-        <p:spPr>
-          <a:xfrm>
-            <a:off x="4572000" y="2468880"/>
-            <a:ext cx="6949440" cy="1005840"/>
-          </a:xfrm>
-          <a:prstGeom prst="rect">
-            <a:avLst/>
-          </a:prstGeom>
-          <a:noFill/>
-          <a:ln/>
-        </p:spPr>
-        <p:txBody>
-          <a:bodyPr wrap="square" rtlCol="0" anchor="ctr"/>
-          <a:lstStyle/>
-          <a:p>
-            <a:pPr marL="0" indent="0">
-              <a:buNone/>
-            </a:pPr>
-            <a:r>
-              <a:rPr lang="en-US" sz="4200" b="1" dirty="0">
-                <a:solidFill>
-                  <a:srgbClr val="FFFFFF"/>
-                </a:solidFill>
-                <a:latin typeface="Cambria" pitchFamily="34" charset="0"/>
-                <a:ea typeface="Cambria" pitchFamily="34" charset="-122"/>
-                <a:cs typeface="Cambria" pitchFamily="34" charset="-120"/>
-              </a:rPr>
-              <a:t>Gracias</a:t>
-            </a:r>
-            <a:endParaRPr lang="en-US" sz="4200" dirty="0"/>
-          </a:p>
-        </p:txBody>
-      </p:sp>
-      <p:sp>
-        <p:nvSpPr>
-          <p:cNvPr id="7" name="Text 5"/>
-          <p:cNvSpPr/>
-          <p:nvPr/>
-        </p:nvSpPr>
-        <p:spPr>
-          <a:xfrm>
-            <a:off x="4572000" y="3429000"/>
-            <a:ext cx="6949440" cy="457200"/>
-          </a:xfrm>
-          <a:prstGeom prst="rect">
-            <a:avLst/>
-          </a:prstGeom>
-          <a:noFill/>
-          <a:ln/>
-        </p:spPr>
-        <p:txBody>
-          <a:bodyPr wrap="square" rtlCol="0" anchor="ctr"/>
-          <a:lstStyle/>
-          <a:p>
-            <a:pPr marL="0" indent="0">
-              <a:buNone/>
-            </a:pPr>
-            <a:r>
-              <a:rPr lang="en-US" sz="1300" dirty="0">
-                <a:solidFill>
-                  <a:srgbClr val="CADCFC"/>
-                </a:solidFill>
-                <a:latin typeface="Calibri" pitchFamily="34" charset="0"/>
-                <a:ea typeface="Calibri" pitchFamily="34" charset="-122"/>
-                <a:cs typeface="Calibri" pitchFamily="34" charset="-120"/>
-              </a:rPr>
-              <a:t>Pipeline de Datos del Macroentorno Ecuatoriano · Gestión de Datos, Sexto Ciclo · UTPL</a:t>
-            </a:r>
-            <a:endParaRPr lang="en-US" sz="1300" dirty="0"/>
-          </a:p>
-        </p:txBody>
-      </p:sp>
-      <p:sp>
-        <p:nvSpPr>
-          <p:cNvPr id="8" name="Text 6"/>
-          <p:cNvSpPr/>
-          <p:nvPr/>
-        </p:nvSpPr>
-        <p:spPr>
-          <a:xfrm>
-            <a:off x="4572000" y="4114800"/>
-            <a:ext cx="6400800" cy="365760"/>
-          </a:xfrm>
-          <a:prstGeom prst="rect">
-            <a:avLst/>
-          </a:prstGeom>
-          <a:noFill/>
-          <a:ln/>
-        </p:spPr>
-        <p:txBody>
-          <a:bodyPr wrap="square" rtlCol="0" anchor="ctr"/>
-          <a:lstStyle/>
-          <a:p>
-            <a:pPr marL="0" indent="0">
-              <a:buNone/>
-            </a:pPr>
-            <a:r>
-              <a:rPr lang="en-US" sz="1300" b="1" dirty="0">
-                <a:solidFill>
-                  <a:srgbClr val="FFFFFF"/>
-                </a:solidFill>
-                <a:latin typeface="Calibri" pitchFamily="34" charset="0"/>
-                <a:ea typeface="Calibri" pitchFamily="34" charset="-122"/>
-                <a:cs typeface="Calibri" pitchFamily="34" charset="-120"/>
-              </a:rPr>
-              <a:t>Mateo Leonardo Yaguache Plaza</a:t>
-            </a:r>
-            <a:endParaRPr lang="en-US" sz="1300" dirty="0"/>
-          </a:p>
-        </p:txBody>
-      </p:sp>
-      <p:sp>
-        <p:nvSpPr>
-          <p:cNvPr id="9" name="Text 7"/>
-          <p:cNvSpPr/>
-          <p:nvPr/>
-        </p:nvSpPr>
-        <p:spPr>
-          <a:xfrm>
-            <a:off x="4572000" y="4434840"/>
-            <a:ext cx="6400800" cy="365760"/>
-          </a:xfrm>
-          <a:prstGeom prst="rect">
-            <a:avLst/>
-          </a:prstGeom>
-          <a:noFill/>
-          <a:ln/>
-        </p:spPr>
-        <p:txBody>
-          <a:bodyPr wrap="square" rtlCol="0" anchor="ctr"/>
-          <a:lstStyle/>
-          <a:p>
-            <a:pPr marL="0" indent="0">
-              <a:buNone/>
-            </a:pPr>
-            <a:r>
-              <a:rPr lang="en-US" sz="1200" dirty="0">
-                <a:solidFill>
-                  <a:srgbClr val="A9BEDD"/>
-                </a:solidFill>
-                <a:latin typeface="Calibri" pitchFamily="34" charset="0"/>
-                <a:ea typeface="Calibri" pitchFamily="34" charset="-122"/>
-                <a:cs typeface="Calibri" pitchFamily="34" charset="-120"/>
-              </a:rPr>
-              <a:t>Docente: Francisco Oswaldo Vargas Naula</a:t>
-            </a:r>
-            <a:endParaRPr lang="en-US" sz="1200" dirty="0"/>
           </a:p>
         </p:txBody>
       </p:sp>

--- a/Reto final/Macroentorno_Ecuatoriano_Presentacion.pptx
+++ b/Reto final/Macroentorno_Ecuatoriano_Presentacion.pptx
@@ -5,19 +5,18 @@
     <p:sldMasterId id="2147483648" r:id="rId1"/>
   </p:sldMasterIdLst>
   <p:notesMasterIdLst>
-    <p:notesMasterId r:id="rId12"/>
+    <p:notesMasterId r:id="rId11"/>
   </p:notesMasterIdLst>
   <p:sldIdLst>
     <p:sldId id="256" r:id="rId2"/>
     <p:sldId id="258" r:id="rId3"/>
     <p:sldId id="259" r:id="rId4"/>
-    <p:sldId id="263" r:id="rId5"/>
-    <p:sldId id="264" r:id="rId6"/>
-    <p:sldId id="269" r:id="rId7"/>
-    <p:sldId id="275" r:id="rId8"/>
-    <p:sldId id="276" r:id="rId9"/>
-    <p:sldId id="273" r:id="rId10"/>
-    <p:sldId id="274" r:id="rId11"/>
+    <p:sldId id="264" r:id="rId5"/>
+    <p:sldId id="269" r:id="rId6"/>
+    <p:sldId id="275" r:id="rId7"/>
+    <p:sldId id="276" r:id="rId8"/>
+    <p:sldId id="273" r:id="rId9"/>
+    <p:sldId id="274" r:id="rId10"/>
   </p:sldIdLst>
   <p:sldSz cx="12192000" cy="6858000"/>
   <p:notesSz cx="6858000" cy="12192000"/>
@@ -330,90 +329,6 @@
 </p:notes>
 </file>
 
-<file path=ppt/notesSlides/notesSlide10.xml><?xml version="1.0" encoding="utf-8"?>
-<p:notes xmlns:a="http://schemas.openxmlformats.org/drawingml/2006/main" xmlns:r="http://schemas.openxmlformats.org/officeDocument/2006/relationships" xmlns:p="http://schemas.openxmlformats.org/presentationml/2006/main">
-  <p:cSld>
-    <p:spTree>
-      <p:nvGrpSpPr>
-        <p:cNvPr id="1" name=""/>
-        <p:cNvGrpSpPr/>
-        <p:nvPr/>
-      </p:nvGrpSpPr>
-      <p:grpSpPr>
-        <a:xfrm>
-          <a:off x="0" y="0"/>
-          <a:ext cx="0" cy="0"/>
-          <a:chOff x="0" y="0"/>
-          <a:chExt cx="0" cy="0"/>
-        </a:xfrm>
-      </p:grpSpPr>
-      <p:sp>
-        <p:nvSpPr>
-          <p:cNvPr id="2" name="Slide Image Placeholder 1"/>
-          <p:cNvSpPr>
-            <a:spLocks noGrp="1" noRot="1" noChangeAspect="1"/>
-          </p:cNvSpPr>
-          <p:nvPr>
-            <p:ph type="sldImg"/>
-          </p:nvPr>
-        </p:nvSpPr>
-        <p:spPr/>
-      </p:sp>
-      <p:sp>
-        <p:nvSpPr>
-          <p:cNvPr id="3" name="Notes Placeholder 2"/>
-          <p:cNvSpPr>
-            <a:spLocks noGrp="1"/>
-          </p:cNvSpPr>
-          <p:nvPr>
-            <p:ph type="body" idx="1"/>
-          </p:nvPr>
-        </p:nvSpPr>
-        <p:spPr/>
-        <p:txBody>
-          <a:bodyPr/>
-          <a:lstStyle/>
-          <a:p>
-            <a:endParaRPr lang="en-US" dirty="0"/>
-          </a:p>
-        </p:txBody>
-      </p:sp>
-      <p:sp>
-        <p:nvSpPr>
-          <p:cNvPr id="4" name="Slide Number Placeholder 3"/>
-          <p:cNvSpPr>
-            <a:spLocks noGrp="1"/>
-          </p:cNvSpPr>
-          <p:nvPr>
-            <p:ph type="sldNum" sz="quarter" idx="10"/>
-          </p:nvPr>
-        </p:nvSpPr>
-        <p:spPr/>
-        <p:txBody>
-          <a:bodyPr/>
-          <a:lstStyle/>
-          <a:p>
-            <a:fld id="{F7021451-1387-4CA6-816F-3879F97B5CBC}" type="slidenum">
-              <a:rPr lang="en-US"/>
-              <a:t>10</a:t>
-            </a:fld>
-            <a:endParaRPr lang="en-US"/>
-          </a:p>
-        </p:txBody>
-      </p:sp>
-    </p:spTree>
-    <p:extLst>
-      <p:ext uri="{BB962C8B-B14F-4D97-AF65-F5344CB8AC3E}">
-        <p14:creationId xmlns:p14="http://schemas.microsoft.com/office/powerpoint/2010/main" val="1024086991"/>
-      </p:ext>
-    </p:extLst>
-  </p:cSld>
-  <p:clrMapOvr>
-    <a:masterClrMapping/>
-  </p:clrMapOvr>
-</p:notes>
-</file>
-
 <file path=ppt/notesSlides/notesSlide2.xml><?xml version="1.0" encoding="utf-8"?>
 <p:notes xmlns:a="http://schemas.openxmlformats.org/drawingml/2006/main" xmlns:r="http://schemas.openxmlformats.org/officeDocument/2006/relationships" xmlns:p="http://schemas.openxmlformats.org/presentationml/2006/main">
   <p:cSld>
@@ -755,90 +670,6 @@
   <p:cSld>
     <p:spTree>
       <p:nvGrpSpPr>
-        <p:cNvPr id="1" name=""/>
-        <p:cNvGrpSpPr/>
-        <p:nvPr/>
-      </p:nvGrpSpPr>
-      <p:grpSpPr>
-        <a:xfrm>
-          <a:off x="0" y="0"/>
-          <a:ext cx="0" cy="0"/>
-          <a:chOff x="0" y="0"/>
-          <a:chExt cx="0" cy="0"/>
-        </a:xfrm>
-      </p:grpSpPr>
-      <p:sp>
-        <p:nvSpPr>
-          <p:cNvPr id="2" name="Slide Image Placeholder 1"/>
-          <p:cNvSpPr>
-            <a:spLocks noGrp="1" noRot="1" noChangeAspect="1"/>
-          </p:cNvSpPr>
-          <p:nvPr>
-            <p:ph type="sldImg"/>
-          </p:nvPr>
-        </p:nvSpPr>
-        <p:spPr/>
-      </p:sp>
-      <p:sp>
-        <p:nvSpPr>
-          <p:cNvPr id="3" name="Notes Placeholder 2"/>
-          <p:cNvSpPr>
-            <a:spLocks noGrp="1"/>
-          </p:cNvSpPr>
-          <p:nvPr>
-            <p:ph type="body" idx="1"/>
-          </p:nvPr>
-        </p:nvSpPr>
-        <p:spPr/>
-        <p:txBody>
-          <a:bodyPr/>
-          <a:lstStyle/>
-          <a:p>
-            <a:endParaRPr lang="en-US" dirty="0"/>
-          </a:p>
-        </p:txBody>
-      </p:sp>
-      <p:sp>
-        <p:nvSpPr>
-          <p:cNvPr id="4" name="Slide Number Placeholder 3"/>
-          <p:cNvSpPr>
-            <a:spLocks noGrp="1"/>
-          </p:cNvSpPr>
-          <p:nvPr>
-            <p:ph type="sldNum" sz="quarter" idx="10"/>
-          </p:nvPr>
-        </p:nvSpPr>
-        <p:spPr/>
-        <p:txBody>
-          <a:bodyPr/>
-          <a:lstStyle/>
-          <a:p>
-            <a:fld id="{F7021451-1387-4CA6-816F-3879F97B5CBC}" type="slidenum">
-              <a:rPr lang="en-US"/>
-              <a:t>6</a:t>
-            </a:fld>
-            <a:endParaRPr lang="en-US"/>
-          </a:p>
-        </p:txBody>
-      </p:sp>
-    </p:spTree>
-    <p:extLst>
-      <p:ext uri="{BB962C8B-B14F-4D97-AF65-F5344CB8AC3E}">
-        <p14:creationId xmlns:p14="http://schemas.microsoft.com/office/powerpoint/2010/main" val="1024086991"/>
-      </p:ext>
-    </p:extLst>
-  </p:cSld>
-  <p:clrMapOvr>
-    <a:masterClrMapping/>
-  </p:clrMapOvr>
-</p:notes>
-</file>
-
-<file path=ppt/notesSlides/notesSlide7.xml><?xml version="1.0" encoding="utf-8"?>
-<p:notes xmlns:a="http://schemas.openxmlformats.org/drawingml/2006/main" xmlns:r="http://schemas.openxmlformats.org/officeDocument/2006/relationships" xmlns:p="http://schemas.openxmlformats.org/presentationml/2006/main">
-  <p:cSld>
-    <p:spTree>
-      <p:nvGrpSpPr>
         <p:cNvPr id="1" name="">
           <a:extLst>
             <a:ext uri="{FF2B5EF4-FFF2-40B4-BE49-F238E27FC236}">
@@ -923,7 +754,7 @@
           <a:p>
             <a:fld id="{F7021451-1387-4CA6-816F-3879F97B5CBC}" type="slidenum">
               <a:rPr lang="en-US"/>
-              <a:t>7</a:t>
+              <a:t>6</a:t>
             </a:fld>
             <a:endParaRPr lang="en-US"/>
           </a:p>
@@ -942,7 +773,7 @@
 </p:notes>
 </file>
 
-<file path=ppt/notesSlides/notesSlide8.xml><?xml version="1.0" encoding="utf-8"?>
+<file path=ppt/notesSlides/notesSlide7.xml><?xml version="1.0" encoding="utf-8"?>
 <p:notes xmlns:a="http://schemas.openxmlformats.org/drawingml/2006/main" xmlns:r="http://schemas.openxmlformats.org/officeDocument/2006/relationships" xmlns:p="http://schemas.openxmlformats.org/presentationml/2006/main">
   <p:cSld>
     <p:spTree>
@@ -1031,7 +862,7 @@
           <a:p>
             <a:fld id="{F7021451-1387-4CA6-816F-3879F97B5CBC}" type="slidenum">
               <a:rPr lang="en-US"/>
-              <a:t>8</a:t>
+              <a:t>7</a:t>
             </a:fld>
             <a:endParaRPr lang="en-US"/>
           </a:p>
@@ -1041,6 +872,90 @@
     <p:extLst>
       <p:ext uri="{BB962C8B-B14F-4D97-AF65-F5344CB8AC3E}">
         <p14:creationId xmlns:p14="http://schemas.microsoft.com/office/powerpoint/2010/main" val="428144453"/>
+      </p:ext>
+    </p:extLst>
+  </p:cSld>
+  <p:clrMapOvr>
+    <a:masterClrMapping/>
+  </p:clrMapOvr>
+</p:notes>
+</file>
+
+<file path=ppt/notesSlides/notesSlide8.xml><?xml version="1.0" encoding="utf-8"?>
+<p:notes xmlns:a="http://schemas.openxmlformats.org/drawingml/2006/main" xmlns:r="http://schemas.openxmlformats.org/officeDocument/2006/relationships" xmlns:p="http://schemas.openxmlformats.org/presentationml/2006/main">
+  <p:cSld>
+    <p:spTree>
+      <p:nvGrpSpPr>
+        <p:cNvPr id="1" name=""/>
+        <p:cNvGrpSpPr/>
+        <p:nvPr/>
+      </p:nvGrpSpPr>
+      <p:grpSpPr>
+        <a:xfrm>
+          <a:off x="0" y="0"/>
+          <a:ext cx="0" cy="0"/>
+          <a:chOff x="0" y="0"/>
+          <a:chExt cx="0" cy="0"/>
+        </a:xfrm>
+      </p:grpSpPr>
+      <p:sp>
+        <p:nvSpPr>
+          <p:cNvPr id="2" name="Slide Image Placeholder 1"/>
+          <p:cNvSpPr>
+            <a:spLocks noGrp="1" noRot="1" noChangeAspect="1"/>
+          </p:cNvSpPr>
+          <p:nvPr>
+            <p:ph type="sldImg"/>
+          </p:nvPr>
+        </p:nvSpPr>
+        <p:spPr/>
+      </p:sp>
+      <p:sp>
+        <p:nvSpPr>
+          <p:cNvPr id="3" name="Notes Placeholder 2"/>
+          <p:cNvSpPr>
+            <a:spLocks noGrp="1"/>
+          </p:cNvSpPr>
+          <p:nvPr>
+            <p:ph type="body" idx="1"/>
+          </p:nvPr>
+        </p:nvSpPr>
+        <p:spPr/>
+        <p:txBody>
+          <a:bodyPr/>
+          <a:lstStyle/>
+          <a:p>
+            <a:endParaRPr lang="en-US" dirty="0"/>
+          </a:p>
+        </p:txBody>
+      </p:sp>
+      <p:sp>
+        <p:nvSpPr>
+          <p:cNvPr id="4" name="Slide Number Placeholder 3"/>
+          <p:cNvSpPr>
+            <a:spLocks noGrp="1"/>
+          </p:cNvSpPr>
+          <p:nvPr>
+            <p:ph type="sldNum" sz="quarter" idx="10"/>
+          </p:nvPr>
+        </p:nvSpPr>
+        <p:spPr/>
+        <p:txBody>
+          <a:bodyPr/>
+          <a:lstStyle/>
+          <a:p>
+            <a:fld id="{F7021451-1387-4CA6-816F-3879F97B5CBC}" type="slidenum">
+              <a:rPr lang="en-US"/>
+              <a:t>8</a:t>
+            </a:fld>
+            <a:endParaRPr lang="en-US"/>
+          </a:p>
+        </p:txBody>
+      </p:sp>
+    </p:spTree>
+    <p:extLst>
+      <p:ext uri="{BB962C8B-B14F-4D97-AF65-F5344CB8AC3E}">
+        <p14:creationId xmlns:p14="http://schemas.microsoft.com/office/powerpoint/2010/main" val="1024086991"/>
       </p:ext>
     </p:extLst>
   </p:cSld>
@@ -1612,14 +1527,13 @@
           <a:bodyPr wrap="square" rtlCol="0" anchor="ctr"/>
           <a:lstStyle/>
           <a:p>
-            <a:pPr marL="0" indent="0">
+            <a:pPr>
               <a:lnSpc>
                 <a:spcPts val="4400"/>
               </a:lnSpc>
-              <a:buNone/>
             </a:pPr>
             <a:r>
-              <a:rPr lang="en-US" sz="4000" b="1" dirty="0">
+              <a:rPr lang="es-ES" sz="4000" b="1" dirty="0">
                 <a:solidFill>
                   <a:srgbClr val="FFFFFF"/>
                 </a:solidFill>
@@ -1627,7 +1541,7 @@
                 <a:ea typeface="Cambria" pitchFamily="34" charset="-122"/>
                 <a:cs typeface="Cambria" pitchFamily="34" charset="-120"/>
               </a:rPr>
-              <a:t>Reto final </a:t>
+              <a:t>Análisis del Macroentorno y Sector Educativo</a:t>
             </a:r>
             <a:endParaRPr lang="en-US" sz="4000" dirty="0"/>
           </a:p>
@@ -1738,198 +1652,6 @@
                 <a:cs typeface="Calibri" pitchFamily="34" charset="-120"/>
               </a:rPr>
               <a:t>Julio, 2026</a:t>
-            </a:r>
-            <a:endParaRPr lang="en-US" sz="1300" dirty="0"/>
-          </a:p>
-        </p:txBody>
-      </p:sp>
-    </p:spTree>
-  </p:cSld>
-  <p:clrMapOvr>
-    <a:masterClrMapping/>
-  </p:clrMapOvr>
-</p:sld>
-</file>
-
-<file path=ppt/slides/slide10.xml><?xml version="1.0" encoding="utf-8"?>
-<p:sld xmlns:a="http://schemas.openxmlformats.org/drawingml/2006/main" xmlns:r="http://schemas.openxmlformats.org/officeDocument/2006/relationships" xmlns:p="http://schemas.openxmlformats.org/presentationml/2006/main">
-  <p:cSld name="Slide 19">
-    <p:bg>
-      <p:bgPr>
-        <a:solidFill>
-          <a:srgbClr val="21295C"/>
-        </a:solidFill>
-        <a:effectLst/>
-      </p:bgPr>
-    </p:bg>
-    <p:spTree>
-      <p:nvGrpSpPr>
-        <p:cNvPr id="1" name=""/>
-        <p:cNvGrpSpPr/>
-        <p:nvPr/>
-      </p:nvGrpSpPr>
-      <p:grpSpPr>
-        <a:xfrm>
-          <a:off x="0" y="0"/>
-          <a:ext cx="0" cy="0"/>
-          <a:chOff x="0" y="0"/>
-          <a:chExt cx="0" cy="0"/>
-        </a:xfrm>
-      </p:grpSpPr>
-      <p:sp>
-        <p:nvSpPr>
-          <p:cNvPr id="3" name="Shape 1"/>
-          <p:cNvSpPr/>
-          <p:nvPr/>
-        </p:nvSpPr>
-        <p:spPr>
-          <a:xfrm>
-            <a:off x="0" y="0"/>
-            <a:ext cx="3959352" cy="2194560"/>
-          </a:xfrm>
-          <a:prstGeom prst="rect">
-            <a:avLst/>
-          </a:prstGeom>
-          <a:solidFill>
-            <a:srgbClr val="065A82"/>
-          </a:solidFill>
-          <a:ln/>
-        </p:spPr>
-        <p:txBody>
-          <a:bodyPr/>
-          <a:lstStyle/>
-          <a:p>
-            <a:endParaRPr lang="es-EC"/>
-          </a:p>
-        </p:txBody>
-      </p:sp>
-      <p:sp>
-        <p:nvSpPr>
-          <p:cNvPr id="4" name="Shape 2"/>
-          <p:cNvSpPr/>
-          <p:nvPr/>
-        </p:nvSpPr>
-        <p:spPr>
-          <a:xfrm>
-            <a:off x="0" y="2148840"/>
-            <a:ext cx="3410712" cy="2194560"/>
-          </a:xfrm>
-          <a:prstGeom prst="rect">
-            <a:avLst/>
-          </a:prstGeom>
-          <a:solidFill>
-            <a:srgbClr val="1C7293"/>
-          </a:solidFill>
-          <a:ln/>
-        </p:spPr>
-        <p:txBody>
-          <a:bodyPr/>
-          <a:lstStyle/>
-          <a:p>
-            <a:endParaRPr lang="es-EC"/>
-          </a:p>
-        </p:txBody>
-      </p:sp>
-      <p:sp>
-        <p:nvSpPr>
-          <p:cNvPr id="5" name="Shape 3"/>
-          <p:cNvSpPr/>
-          <p:nvPr/>
-        </p:nvSpPr>
-        <p:spPr>
-          <a:xfrm>
-            <a:off x="0" y="4297680"/>
-            <a:ext cx="2862072" cy="2194560"/>
-          </a:xfrm>
-          <a:prstGeom prst="rect">
-            <a:avLst/>
-          </a:prstGeom>
-          <a:solidFill>
-            <a:srgbClr val="5FB3A3"/>
-          </a:solidFill>
-          <a:ln/>
-        </p:spPr>
-        <p:txBody>
-          <a:bodyPr/>
-          <a:lstStyle/>
-          <a:p>
-            <a:endParaRPr lang="es-EC"/>
-          </a:p>
-        </p:txBody>
-      </p:sp>
-      <p:sp>
-        <p:nvSpPr>
-          <p:cNvPr id="6" name="Text 4"/>
-          <p:cNvSpPr/>
-          <p:nvPr/>
-        </p:nvSpPr>
-        <p:spPr>
-          <a:xfrm>
-            <a:off x="4572000" y="2468880"/>
-            <a:ext cx="6949440" cy="1005840"/>
-          </a:xfrm>
-          <a:prstGeom prst="rect">
-            <a:avLst/>
-          </a:prstGeom>
-          <a:noFill/>
-          <a:ln/>
-        </p:spPr>
-        <p:txBody>
-          <a:bodyPr wrap="square" rtlCol="0" anchor="ctr"/>
-          <a:lstStyle/>
-          <a:p>
-            <a:pPr marL="0" indent="0">
-              <a:buNone/>
-            </a:pPr>
-            <a:r>
-              <a:rPr lang="en-US" sz="4200" b="1" dirty="0">
-                <a:solidFill>
-                  <a:srgbClr val="FFFFFF"/>
-                </a:solidFill>
-                <a:latin typeface="Cambria" pitchFamily="34" charset="0"/>
-                <a:ea typeface="Cambria" pitchFamily="34" charset="-122"/>
-                <a:cs typeface="Cambria" pitchFamily="34" charset="-120"/>
-              </a:rPr>
-              <a:t>Gracias</a:t>
-            </a:r>
-            <a:endParaRPr lang="en-US" sz="4200" dirty="0"/>
-          </a:p>
-        </p:txBody>
-      </p:sp>
-      <p:sp>
-        <p:nvSpPr>
-          <p:cNvPr id="8" name="Text 6"/>
-          <p:cNvSpPr/>
-          <p:nvPr/>
-        </p:nvSpPr>
-        <p:spPr>
-          <a:xfrm>
-            <a:off x="4572000" y="4114800"/>
-            <a:ext cx="6400800" cy="365760"/>
-          </a:xfrm>
-          <a:prstGeom prst="rect">
-            <a:avLst/>
-          </a:prstGeom>
-          <a:noFill/>
-          <a:ln/>
-        </p:spPr>
-        <p:txBody>
-          <a:bodyPr wrap="square" rtlCol="0" anchor="ctr"/>
-          <a:lstStyle/>
-          <a:p>
-            <a:pPr marL="0" indent="0">
-              <a:buNone/>
-            </a:pPr>
-            <a:r>
-              <a:rPr lang="en-US" sz="1300" b="1" dirty="0">
-                <a:solidFill>
-                  <a:srgbClr val="FFFFFF"/>
-                </a:solidFill>
-                <a:latin typeface="Calibri" pitchFamily="34" charset="0"/>
-                <a:ea typeface="Calibri" pitchFamily="34" charset="-122"/>
-                <a:cs typeface="Calibri" pitchFamily="34" charset="-120"/>
-              </a:rPr>
-              <a:t>Mateo Leonardo Yaguache Plaza</a:t>
             </a:r>
             <a:endParaRPr lang="en-US" sz="1300" dirty="0"/>
           </a:p>
@@ -3029,7 +2751,29 @@
                 <a:ea typeface="Calibri" pitchFamily="34" charset="-122"/>
                 <a:cs typeface="Calibri" pitchFamily="34" charset="-120"/>
               </a:rPr>
-              <a:t>Diseñar e implementar un pipeline de datos automatizado, escalable y reproducible del macroentorno ecuatoriano, con PostgreSQL 16 como motor de almacenamiento y Python como lenguaje de orquestación.</a:t>
+              <a:t>Diseñar e implementar un pipeline de datos automatizado, </a:t>
+            </a:r>
+            <a:r>
+              <a:rPr lang="en-US" sz="1250" dirty="0" err="1">
+                <a:solidFill>
+                  <a:srgbClr val="FFFFFF"/>
+                </a:solidFill>
+                <a:latin typeface="Calibri" pitchFamily="34" charset="0"/>
+                <a:ea typeface="Calibri" pitchFamily="34" charset="-122"/>
+                <a:cs typeface="Calibri" pitchFamily="34" charset="-120"/>
+              </a:rPr>
+              <a:t>escalable</a:t>
+            </a:r>
+            <a:r>
+              <a:rPr lang="en-US" sz="1250" dirty="0">
+                <a:solidFill>
+                  <a:srgbClr val="FFFFFF"/>
+                </a:solidFill>
+                <a:latin typeface="Calibri" pitchFamily="34" charset="0"/>
+                <a:ea typeface="Calibri" pitchFamily="34" charset="-122"/>
+                <a:cs typeface="Calibri" pitchFamily="34" charset="-120"/>
+              </a:rPr>
+              <a:t>, con PostgreSQL 16 como motor de almacenamiento y Python como lenguaje de orquestación.</a:t>
             </a:r>
             <a:endParaRPr lang="en-US" sz="1250" dirty="0"/>
           </a:p>
@@ -3608,1420 +3352,6 @@
 </file>
 
 <file path=ppt/slides/slide4.xml><?xml version="1.0" encoding="utf-8"?>
-<p:sld xmlns:a="http://schemas.openxmlformats.org/drawingml/2006/main" xmlns:r="http://schemas.openxmlformats.org/officeDocument/2006/relationships" xmlns:p="http://schemas.openxmlformats.org/presentationml/2006/main">
-  <p:cSld name="Slide 8">
-    <p:bg>
-      <p:bgPr>
-        <a:solidFill>
-          <a:srgbClr val="F4F7F9"/>
-        </a:solidFill>
-        <a:effectLst/>
-      </p:bgPr>
-    </p:bg>
-    <p:spTree>
-      <p:nvGrpSpPr>
-        <p:cNvPr id="1" name=""/>
-        <p:cNvGrpSpPr/>
-        <p:nvPr/>
-      </p:nvGrpSpPr>
-      <p:grpSpPr>
-        <a:xfrm>
-          <a:off x="0" y="0"/>
-          <a:ext cx="0" cy="0"/>
-          <a:chOff x="0" y="0"/>
-          <a:chExt cx="0" cy="0"/>
-        </a:xfrm>
-      </p:grpSpPr>
-      <p:sp>
-        <p:nvSpPr>
-          <p:cNvPr id="2" name="Text 0"/>
-          <p:cNvSpPr/>
-          <p:nvPr/>
-        </p:nvSpPr>
-        <p:spPr>
-          <a:xfrm>
-            <a:off x="548640" y="411480"/>
-            <a:ext cx="7315200" cy="320040"/>
-          </a:xfrm>
-          <a:prstGeom prst="rect">
-            <a:avLst/>
-          </a:prstGeom>
-          <a:noFill/>
-          <a:ln/>
-        </p:spPr>
-        <p:txBody>
-          <a:bodyPr wrap="square" rtlCol="0" anchor="ctr"/>
-          <a:lstStyle/>
-          <a:p>
-            <a:pPr marL="0" indent="0">
-              <a:buNone/>
-            </a:pPr>
-            <a:r>
-              <a:rPr lang="en-US" sz="1200" b="1" kern="0" spc="200" dirty="0">
-                <a:solidFill>
-                  <a:srgbClr val="1C7293"/>
-                </a:solidFill>
-                <a:latin typeface="Calibri" pitchFamily="34" charset="0"/>
-                <a:ea typeface="Calibri" pitchFamily="34" charset="-122"/>
-                <a:cs typeface="Calibri" pitchFamily="34" charset="-120"/>
-              </a:rPr>
-              <a:t>RETO 2 · MACROENTORNO — FUENTES</a:t>
-            </a:r>
-            <a:endParaRPr lang="en-US" sz="1200" dirty="0"/>
-          </a:p>
-        </p:txBody>
-      </p:sp>
-      <p:sp>
-        <p:nvSpPr>
-          <p:cNvPr id="3" name="Text 1"/>
-          <p:cNvSpPr/>
-          <p:nvPr/>
-        </p:nvSpPr>
-        <p:spPr>
-          <a:xfrm>
-            <a:off x="548640" y="713232"/>
-            <a:ext cx="10607040" cy="822960"/>
-          </a:xfrm>
-          <a:prstGeom prst="rect">
-            <a:avLst/>
-          </a:prstGeom>
-          <a:noFill/>
-          <a:ln/>
-        </p:spPr>
-        <p:txBody>
-          <a:bodyPr wrap="square" rtlCol="0" anchor="ctr"/>
-          <a:lstStyle/>
-          <a:p>
-            <a:pPr marL="0" indent="0">
-              <a:buNone/>
-            </a:pPr>
-            <a:r>
-              <a:rPr lang="en-US" sz="3000" b="1" dirty="0">
-                <a:solidFill>
-                  <a:srgbClr val="21295C"/>
-                </a:solidFill>
-                <a:latin typeface="Cambria" pitchFamily="34" charset="0"/>
-                <a:ea typeface="Cambria" pitchFamily="34" charset="-122"/>
-                <a:cs typeface="Cambria" pitchFamily="34" charset="-120"/>
-              </a:rPr>
-              <a:t>Cuatro instituciones, doce datasets, 1,6 mill+ registros</a:t>
-            </a:r>
-            <a:endParaRPr lang="en-US" sz="3000" dirty="0"/>
-          </a:p>
-        </p:txBody>
-      </p:sp>
-      <p:sp>
-        <p:nvSpPr>
-          <p:cNvPr id="4" name="Shape 2"/>
-          <p:cNvSpPr/>
-          <p:nvPr/>
-        </p:nvSpPr>
-        <p:spPr>
-          <a:xfrm>
-            <a:off x="548640" y="1828800"/>
-            <a:ext cx="2615184" cy="3291840"/>
-          </a:xfrm>
-          <a:prstGeom prst="roundRect">
-            <a:avLst>
-              <a:gd name="adj" fmla="val 2797"/>
-            </a:avLst>
-          </a:prstGeom>
-          <a:solidFill>
-            <a:srgbClr val="FFFFFF"/>
-          </a:solidFill>
-          <a:ln w="12700">
-            <a:solidFill>
-              <a:srgbClr val="E3E8EB"/>
-            </a:solidFill>
-            <a:prstDash val="solid"/>
-          </a:ln>
-        </p:spPr>
-        <p:txBody>
-          <a:bodyPr/>
-          <a:lstStyle/>
-          <a:p>
-            <a:endParaRPr lang="es-EC"/>
-          </a:p>
-        </p:txBody>
-      </p:sp>
-      <p:sp>
-        <p:nvSpPr>
-          <p:cNvPr id="5" name="Shape 3"/>
-          <p:cNvSpPr/>
-          <p:nvPr/>
-        </p:nvSpPr>
-        <p:spPr>
-          <a:xfrm>
-            <a:off x="548640" y="1828800"/>
-            <a:ext cx="2615184" cy="914400"/>
-          </a:xfrm>
-          <a:prstGeom prst="roundRect">
-            <a:avLst>
-              <a:gd name="adj" fmla="val 8000"/>
-            </a:avLst>
-          </a:prstGeom>
-          <a:solidFill>
-            <a:srgbClr val="065A82"/>
-          </a:solidFill>
-          <a:ln/>
-        </p:spPr>
-        <p:txBody>
-          <a:bodyPr/>
-          <a:lstStyle/>
-          <a:p>
-            <a:endParaRPr lang="es-EC"/>
-          </a:p>
-        </p:txBody>
-      </p:sp>
-      <p:sp>
-        <p:nvSpPr>
-          <p:cNvPr id="6" name="Shape 4"/>
-          <p:cNvSpPr/>
-          <p:nvPr/>
-        </p:nvSpPr>
-        <p:spPr>
-          <a:xfrm>
-            <a:off x="548640" y="2331720"/>
-            <a:ext cx="2615184" cy="411480"/>
-          </a:xfrm>
-          <a:prstGeom prst="rect">
-            <a:avLst/>
-          </a:prstGeom>
-          <a:solidFill>
-            <a:srgbClr val="065A82"/>
-          </a:solidFill>
-          <a:ln/>
-        </p:spPr>
-        <p:txBody>
-          <a:bodyPr/>
-          <a:lstStyle/>
-          <a:p>
-            <a:endParaRPr lang="es-EC"/>
-          </a:p>
-        </p:txBody>
-      </p:sp>
-      <p:sp>
-        <p:nvSpPr>
-          <p:cNvPr id="7" name="Shape 5"/>
-          <p:cNvSpPr/>
-          <p:nvPr/>
-        </p:nvSpPr>
-        <p:spPr>
-          <a:xfrm>
-            <a:off x="1559052" y="1993392"/>
-            <a:ext cx="594360" cy="594360"/>
-          </a:xfrm>
-          <a:prstGeom prst="ellipse">
-            <a:avLst/>
-          </a:prstGeom>
-          <a:solidFill>
-            <a:srgbClr val="1C7293"/>
-          </a:solidFill>
-          <a:ln/>
-        </p:spPr>
-        <p:txBody>
-          <a:bodyPr/>
-          <a:lstStyle/>
-          <a:p>
-            <a:endParaRPr lang="es-EC"/>
-          </a:p>
-        </p:txBody>
-      </p:sp>
-      <p:pic>
-        <p:nvPicPr>
-          <p:cNvPr id="8" name="Image 0" descr="icons/bar_white.png"/>
-          <p:cNvPicPr>
-            <a:picLocks noChangeAspect="1"/>
-          </p:cNvPicPr>
-          <p:nvPr/>
-        </p:nvPicPr>
-        <p:blipFill>
-          <a:blip r:embed="rId3"/>
-          <a:stretch>
-            <a:fillRect/>
-          </a:stretch>
-        </p:blipFill>
-        <p:spPr>
-          <a:xfrm>
-            <a:off x="1713586" y="2147926"/>
-            <a:ext cx="285293" cy="285293"/>
-          </a:xfrm>
-          <a:prstGeom prst="rect">
-            <a:avLst/>
-          </a:prstGeom>
-        </p:spPr>
-      </p:pic>
-      <p:sp>
-        <p:nvSpPr>
-          <p:cNvPr id="9" name="Text 6"/>
-          <p:cNvSpPr/>
-          <p:nvPr/>
-        </p:nvSpPr>
-        <p:spPr>
-          <a:xfrm>
-            <a:off x="640080" y="2834640"/>
-            <a:ext cx="2432304" cy="365760"/>
-          </a:xfrm>
-          <a:prstGeom prst="rect">
-            <a:avLst/>
-          </a:prstGeom>
-          <a:noFill/>
-          <a:ln/>
-        </p:spPr>
-        <p:txBody>
-          <a:bodyPr wrap="square" rtlCol="0" anchor="ctr"/>
-          <a:lstStyle/>
-          <a:p>
-            <a:pPr marL="0" indent="0" algn="ctr">
-              <a:buNone/>
-            </a:pPr>
-            <a:r>
-              <a:rPr lang="en-US" sz="1500" b="1" dirty="0">
-                <a:solidFill>
-                  <a:srgbClr val="21295C"/>
-                </a:solidFill>
-                <a:latin typeface="Cambria" pitchFamily="34" charset="0"/>
-                <a:ea typeface="Cambria" pitchFamily="34" charset="-122"/>
-                <a:cs typeface="Cambria" pitchFamily="34" charset="-120"/>
-              </a:rPr>
-              <a:t>BCE</a:t>
-            </a:r>
-            <a:endParaRPr lang="en-US" sz="1500" dirty="0"/>
-          </a:p>
-        </p:txBody>
-      </p:sp>
-      <p:sp>
-        <p:nvSpPr>
-          <p:cNvPr id="10" name="Text 7"/>
-          <p:cNvSpPr/>
-          <p:nvPr/>
-        </p:nvSpPr>
-        <p:spPr>
-          <a:xfrm>
-            <a:off x="685800" y="3246120"/>
-            <a:ext cx="2340864" cy="685800"/>
-          </a:xfrm>
-          <a:prstGeom prst="rect">
-            <a:avLst/>
-          </a:prstGeom>
-          <a:noFill/>
-          <a:ln/>
-        </p:spPr>
-        <p:txBody>
-          <a:bodyPr wrap="square" rtlCol="0" anchor="t"/>
-          <a:lstStyle/>
-          <a:p>
-            <a:pPr marL="0" indent="0" algn="ctr">
-              <a:buNone/>
-            </a:pPr>
-            <a:r>
-              <a:rPr lang="en-US" sz="1000" i="1" dirty="0">
-                <a:solidFill>
-                  <a:srgbClr val="6B7480"/>
-                </a:solidFill>
-                <a:latin typeface="Calibri" pitchFamily="34" charset="0"/>
-                <a:ea typeface="Calibri" pitchFamily="34" charset="-122"/>
-                <a:cs typeface="Calibri" pitchFamily="34" charset="-120"/>
-              </a:rPr>
-              <a:t>Banco Central del Ecuador</a:t>
-            </a:r>
-            <a:endParaRPr lang="en-US" sz="1000" dirty="0"/>
-          </a:p>
-        </p:txBody>
-      </p:sp>
-      <p:sp>
-        <p:nvSpPr>
-          <p:cNvPr id="11" name="Shape 8"/>
-          <p:cNvSpPr/>
-          <p:nvPr/>
-        </p:nvSpPr>
-        <p:spPr>
-          <a:xfrm>
-            <a:off x="822960" y="3977640"/>
-            <a:ext cx="2066544" cy="0"/>
-          </a:xfrm>
-          <a:prstGeom prst="line">
-            <a:avLst/>
-          </a:prstGeom>
-          <a:noFill/>
-          <a:ln w="12700">
-            <a:solidFill>
-              <a:srgbClr val="E3E8EB"/>
-            </a:solidFill>
-            <a:prstDash val="solid"/>
-          </a:ln>
-        </p:spPr>
-        <p:txBody>
-          <a:bodyPr/>
-          <a:lstStyle/>
-          <a:p>
-            <a:endParaRPr lang="es-EC"/>
-          </a:p>
-        </p:txBody>
-      </p:sp>
-      <p:sp>
-        <p:nvSpPr>
-          <p:cNvPr id="12" name="Text 9"/>
-          <p:cNvSpPr/>
-          <p:nvPr/>
-        </p:nvSpPr>
-        <p:spPr>
-          <a:xfrm>
-            <a:off x="713232" y="4114800"/>
-            <a:ext cx="2286000" cy="868680"/>
-          </a:xfrm>
-          <a:prstGeom prst="rect">
-            <a:avLst/>
-          </a:prstGeom>
-          <a:noFill/>
-          <a:ln/>
-        </p:spPr>
-        <p:txBody>
-          <a:bodyPr wrap="square" rtlCol="0" anchor="t"/>
-          <a:lstStyle/>
-          <a:p>
-            <a:pPr marL="0" indent="0" algn="ctr">
-              <a:buNone/>
-            </a:pPr>
-            <a:r>
-              <a:rPr lang="en-US" sz="1050" dirty="0">
-                <a:solidFill>
-                  <a:srgbClr val="2B2B33"/>
-                </a:solidFill>
-                <a:latin typeface="Calibri" pitchFamily="34" charset="0"/>
-                <a:ea typeface="Calibri" pitchFamily="34" charset="-122"/>
-                <a:cs typeface="Calibri" pitchFamily="34" charset="-120"/>
-              </a:rPr>
-              <a:t>6 datasets · PIB, WTI, riesgo país, IEE, VAB</a:t>
-            </a:r>
-            <a:endParaRPr lang="en-US" sz="1050" dirty="0"/>
-          </a:p>
-        </p:txBody>
-      </p:sp>
-      <p:sp>
-        <p:nvSpPr>
-          <p:cNvPr id="13" name="Shape 10"/>
-          <p:cNvSpPr/>
-          <p:nvPr/>
-        </p:nvSpPr>
-        <p:spPr>
-          <a:xfrm>
-            <a:off x="3383280" y="1828800"/>
-            <a:ext cx="2615184" cy="3291840"/>
-          </a:xfrm>
-          <a:prstGeom prst="roundRect">
-            <a:avLst>
-              <a:gd name="adj" fmla="val 2797"/>
-            </a:avLst>
-          </a:prstGeom>
-          <a:solidFill>
-            <a:srgbClr val="FFFFFF"/>
-          </a:solidFill>
-          <a:ln w="12700">
-            <a:solidFill>
-              <a:srgbClr val="E3E8EB"/>
-            </a:solidFill>
-            <a:prstDash val="solid"/>
-          </a:ln>
-        </p:spPr>
-        <p:txBody>
-          <a:bodyPr/>
-          <a:lstStyle/>
-          <a:p>
-            <a:endParaRPr lang="es-EC"/>
-          </a:p>
-        </p:txBody>
-      </p:sp>
-      <p:sp>
-        <p:nvSpPr>
-          <p:cNvPr id="14" name="Shape 11"/>
-          <p:cNvSpPr/>
-          <p:nvPr/>
-        </p:nvSpPr>
-        <p:spPr>
-          <a:xfrm>
-            <a:off x="3383280" y="1828800"/>
-            <a:ext cx="2615184" cy="914400"/>
-          </a:xfrm>
-          <a:prstGeom prst="roundRect">
-            <a:avLst>
-              <a:gd name="adj" fmla="val 8000"/>
-            </a:avLst>
-          </a:prstGeom>
-          <a:solidFill>
-            <a:srgbClr val="065A82"/>
-          </a:solidFill>
-          <a:ln/>
-        </p:spPr>
-        <p:txBody>
-          <a:bodyPr/>
-          <a:lstStyle/>
-          <a:p>
-            <a:endParaRPr lang="es-EC"/>
-          </a:p>
-        </p:txBody>
-      </p:sp>
-      <p:sp>
-        <p:nvSpPr>
-          <p:cNvPr id="15" name="Shape 12"/>
-          <p:cNvSpPr/>
-          <p:nvPr/>
-        </p:nvSpPr>
-        <p:spPr>
-          <a:xfrm>
-            <a:off x="3383280" y="2331720"/>
-            <a:ext cx="2615184" cy="411480"/>
-          </a:xfrm>
-          <a:prstGeom prst="rect">
-            <a:avLst/>
-          </a:prstGeom>
-          <a:solidFill>
-            <a:srgbClr val="065A82"/>
-          </a:solidFill>
-          <a:ln/>
-        </p:spPr>
-        <p:txBody>
-          <a:bodyPr/>
-          <a:lstStyle/>
-          <a:p>
-            <a:endParaRPr lang="es-EC"/>
-          </a:p>
-        </p:txBody>
-      </p:sp>
-      <p:sp>
-        <p:nvSpPr>
-          <p:cNvPr id="16" name="Shape 13"/>
-          <p:cNvSpPr/>
-          <p:nvPr/>
-        </p:nvSpPr>
-        <p:spPr>
-          <a:xfrm>
-            <a:off x="4393692" y="1993392"/>
-            <a:ext cx="594360" cy="594360"/>
-          </a:xfrm>
-          <a:prstGeom prst="ellipse">
-            <a:avLst/>
-          </a:prstGeom>
-          <a:solidFill>
-            <a:srgbClr val="1C7293"/>
-          </a:solidFill>
-          <a:ln/>
-        </p:spPr>
-        <p:txBody>
-          <a:bodyPr/>
-          <a:lstStyle/>
-          <a:p>
-            <a:endParaRPr lang="es-EC"/>
-          </a:p>
-        </p:txBody>
-      </p:sp>
-      <p:pic>
-        <p:nvPicPr>
-          <p:cNvPr id="17" name="Image 1" descr="icons/users_white.png"/>
-          <p:cNvPicPr>
-            <a:picLocks noChangeAspect="1"/>
-          </p:cNvPicPr>
-          <p:nvPr/>
-        </p:nvPicPr>
-        <p:blipFill>
-          <a:blip r:embed="rId4"/>
-          <a:stretch>
-            <a:fillRect/>
-          </a:stretch>
-        </p:blipFill>
-        <p:spPr>
-          <a:xfrm>
-            <a:off x="4548226" y="2147926"/>
-            <a:ext cx="285293" cy="285293"/>
-          </a:xfrm>
-          <a:prstGeom prst="rect">
-            <a:avLst/>
-          </a:prstGeom>
-        </p:spPr>
-      </p:pic>
-      <p:sp>
-        <p:nvSpPr>
-          <p:cNvPr id="18" name="Text 14"/>
-          <p:cNvSpPr/>
-          <p:nvPr/>
-        </p:nvSpPr>
-        <p:spPr>
-          <a:xfrm>
-            <a:off x="3474720" y="2834640"/>
-            <a:ext cx="2432304" cy="365760"/>
-          </a:xfrm>
-          <a:prstGeom prst="rect">
-            <a:avLst/>
-          </a:prstGeom>
-          <a:noFill/>
-          <a:ln/>
-        </p:spPr>
-        <p:txBody>
-          <a:bodyPr wrap="square" rtlCol="0" anchor="ctr"/>
-          <a:lstStyle/>
-          <a:p>
-            <a:pPr marL="0" indent="0" algn="ctr">
-              <a:buNone/>
-            </a:pPr>
-            <a:r>
-              <a:rPr lang="en-US" sz="1500" b="1" dirty="0">
-                <a:solidFill>
-                  <a:srgbClr val="21295C"/>
-                </a:solidFill>
-                <a:latin typeface="Cambria" pitchFamily="34" charset="0"/>
-                <a:ea typeface="Cambria" pitchFamily="34" charset="-122"/>
-                <a:cs typeface="Cambria" pitchFamily="34" charset="-120"/>
-              </a:rPr>
-              <a:t>INEC</a:t>
-            </a:r>
-            <a:endParaRPr lang="en-US" sz="1500" dirty="0"/>
-          </a:p>
-        </p:txBody>
-      </p:sp>
-      <p:sp>
-        <p:nvSpPr>
-          <p:cNvPr id="19" name="Text 15"/>
-          <p:cNvSpPr/>
-          <p:nvPr/>
-        </p:nvSpPr>
-        <p:spPr>
-          <a:xfrm>
-            <a:off x="3520440" y="3246120"/>
-            <a:ext cx="2340864" cy="685800"/>
-          </a:xfrm>
-          <a:prstGeom prst="rect">
-            <a:avLst/>
-          </a:prstGeom>
-          <a:noFill/>
-          <a:ln/>
-        </p:spPr>
-        <p:txBody>
-          <a:bodyPr wrap="square" rtlCol="0" anchor="t"/>
-          <a:lstStyle/>
-          <a:p>
-            <a:pPr marL="0" indent="0" algn="ctr">
-              <a:buNone/>
-            </a:pPr>
-            <a:r>
-              <a:rPr lang="en-US" sz="1000" i="1" dirty="0">
-                <a:solidFill>
-                  <a:srgbClr val="6B7480"/>
-                </a:solidFill>
-                <a:latin typeface="Calibri" pitchFamily="34" charset="0"/>
-                <a:ea typeface="Calibri" pitchFamily="34" charset="-122"/>
-                <a:cs typeface="Calibri" pitchFamily="34" charset="-120"/>
-              </a:rPr>
-              <a:t>Instituto Nac. de Estadística y Censos</a:t>
-            </a:r>
-            <a:endParaRPr lang="en-US" sz="1000" dirty="0"/>
-          </a:p>
-        </p:txBody>
-      </p:sp>
-      <p:sp>
-        <p:nvSpPr>
-          <p:cNvPr id="20" name="Shape 16"/>
-          <p:cNvSpPr/>
-          <p:nvPr/>
-        </p:nvSpPr>
-        <p:spPr>
-          <a:xfrm>
-            <a:off x="3657600" y="3977640"/>
-            <a:ext cx="2066544" cy="0"/>
-          </a:xfrm>
-          <a:prstGeom prst="line">
-            <a:avLst/>
-          </a:prstGeom>
-          <a:noFill/>
-          <a:ln w="12700">
-            <a:solidFill>
-              <a:srgbClr val="E3E8EB"/>
-            </a:solidFill>
-            <a:prstDash val="solid"/>
-          </a:ln>
-        </p:spPr>
-        <p:txBody>
-          <a:bodyPr/>
-          <a:lstStyle/>
-          <a:p>
-            <a:endParaRPr lang="es-EC"/>
-          </a:p>
-        </p:txBody>
-      </p:sp>
-      <p:sp>
-        <p:nvSpPr>
-          <p:cNvPr id="21" name="Text 17"/>
-          <p:cNvSpPr/>
-          <p:nvPr/>
-        </p:nvSpPr>
-        <p:spPr>
-          <a:xfrm>
-            <a:off x="3547872" y="4114800"/>
-            <a:ext cx="2286000" cy="868680"/>
-          </a:xfrm>
-          <a:prstGeom prst="rect">
-            <a:avLst/>
-          </a:prstGeom>
-          <a:noFill/>
-          <a:ln/>
-        </p:spPr>
-        <p:txBody>
-          <a:bodyPr wrap="square" rtlCol="0" anchor="t"/>
-          <a:lstStyle/>
-          <a:p>
-            <a:pPr marL="0" indent="0" algn="ctr">
-              <a:buNone/>
-            </a:pPr>
-            <a:r>
-              <a:rPr lang="en-US" sz="1050" dirty="0">
-                <a:solidFill>
-                  <a:srgbClr val="2B2B33"/>
-                </a:solidFill>
-                <a:latin typeface="Calibri" pitchFamily="34" charset="0"/>
-                <a:ea typeface="Calibri" pitchFamily="34" charset="-122"/>
-                <a:cs typeface="Calibri" pitchFamily="34" charset="-120"/>
-              </a:rPr>
-              <a:t>2 datasets · ENEMDU, Censo 2022</a:t>
-            </a:r>
-            <a:endParaRPr lang="en-US" sz="1050" dirty="0"/>
-          </a:p>
-        </p:txBody>
-      </p:sp>
-      <p:sp>
-        <p:nvSpPr>
-          <p:cNvPr id="22" name="Shape 18"/>
-          <p:cNvSpPr/>
-          <p:nvPr/>
-        </p:nvSpPr>
-        <p:spPr>
-          <a:xfrm>
-            <a:off x="6217920" y="1828800"/>
-            <a:ext cx="2615184" cy="3291840"/>
-          </a:xfrm>
-          <a:prstGeom prst="roundRect">
-            <a:avLst>
-              <a:gd name="adj" fmla="val 2797"/>
-            </a:avLst>
-          </a:prstGeom>
-          <a:solidFill>
-            <a:srgbClr val="FFFFFF"/>
-          </a:solidFill>
-          <a:ln w="12700">
-            <a:solidFill>
-              <a:srgbClr val="E3E8EB"/>
-            </a:solidFill>
-            <a:prstDash val="solid"/>
-          </a:ln>
-        </p:spPr>
-        <p:txBody>
-          <a:bodyPr/>
-          <a:lstStyle/>
-          <a:p>
-            <a:endParaRPr lang="es-EC"/>
-          </a:p>
-        </p:txBody>
-      </p:sp>
-      <p:sp>
-        <p:nvSpPr>
-          <p:cNvPr id="23" name="Shape 19"/>
-          <p:cNvSpPr/>
-          <p:nvPr/>
-        </p:nvSpPr>
-        <p:spPr>
-          <a:xfrm>
-            <a:off x="6217920" y="1828800"/>
-            <a:ext cx="2615184" cy="914400"/>
-          </a:xfrm>
-          <a:prstGeom prst="roundRect">
-            <a:avLst>
-              <a:gd name="adj" fmla="val 8000"/>
-            </a:avLst>
-          </a:prstGeom>
-          <a:solidFill>
-            <a:srgbClr val="065A82"/>
-          </a:solidFill>
-          <a:ln/>
-        </p:spPr>
-        <p:txBody>
-          <a:bodyPr/>
-          <a:lstStyle/>
-          <a:p>
-            <a:endParaRPr lang="es-EC"/>
-          </a:p>
-        </p:txBody>
-      </p:sp>
-      <p:sp>
-        <p:nvSpPr>
-          <p:cNvPr id="24" name="Shape 20"/>
-          <p:cNvSpPr/>
-          <p:nvPr/>
-        </p:nvSpPr>
-        <p:spPr>
-          <a:xfrm>
-            <a:off x="6217920" y="2331720"/>
-            <a:ext cx="2615184" cy="411480"/>
-          </a:xfrm>
-          <a:prstGeom prst="rect">
-            <a:avLst/>
-          </a:prstGeom>
-          <a:solidFill>
-            <a:srgbClr val="065A82"/>
-          </a:solidFill>
-          <a:ln/>
-        </p:spPr>
-        <p:txBody>
-          <a:bodyPr/>
-          <a:lstStyle/>
-          <a:p>
-            <a:endParaRPr lang="es-EC"/>
-          </a:p>
-        </p:txBody>
-      </p:sp>
-      <p:sp>
-        <p:nvSpPr>
-          <p:cNvPr id="25" name="Shape 21"/>
-          <p:cNvSpPr/>
-          <p:nvPr/>
-        </p:nvSpPr>
-        <p:spPr>
-          <a:xfrm>
-            <a:off x="7228332" y="1993392"/>
-            <a:ext cx="594360" cy="594360"/>
-          </a:xfrm>
-          <a:prstGeom prst="ellipse">
-            <a:avLst/>
-          </a:prstGeom>
-          <a:solidFill>
-            <a:srgbClr val="1C7293"/>
-          </a:solidFill>
-          <a:ln/>
-        </p:spPr>
-        <p:txBody>
-          <a:bodyPr/>
-          <a:lstStyle/>
-          <a:p>
-            <a:endParaRPr lang="es-EC"/>
-          </a:p>
-        </p:txBody>
-      </p:sp>
-      <p:pic>
-        <p:nvPicPr>
-          <p:cNvPr id="26" name="Image 2" descr="icons/briefcase_white.png"/>
-          <p:cNvPicPr>
-            <a:picLocks noChangeAspect="1"/>
-          </p:cNvPicPr>
-          <p:nvPr/>
-        </p:nvPicPr>
-        <p:blipFill>
-          <a:blip r:embed="rId5"/>
-          <a:stretch>
-            <a:fillRect/>
-          </a:stretch>
-        </p:blipFill>
-        <p:spPr>
-          <a:xfrm>
-            <a:off x="7382866" y="2147926"/>
-            <a:ext cx="285293" cy="285293"/>
-          </a:xfrm>
-          <a:prstGeom prst="rect">
-            <a:avLst/>
-          </a:prstGeom>
-        </p:spPr>
-      </p:pic>
-      <p:sp>
-        <p:nvSpPr>
-          <p:cNvPr id="27" name="Text 22"/>
-          <p:cNvSpPr/>
-          <p:nvPr/>
-        </p:nvSpPr>
-        <p:spPr>
-          <a:xfrm>
-            <a:off x="6309360" y="2834640"/>
-            <a:ext cx="2432304" cy="365760"/>
-          </a:xfrm>
-          <a:prstGeom prst="rect">
-            <a:avLst/>
-          </a:prstGeom>
-          <a:noFill/>
-          <a:ln/>
-        </p:spPr>
-        <p:txBody>
-          <a:bodyPr wrap="square" rtlCol="0" anchor="ctr"/>
-          <a:lstStyle/>
-          <a:p>
-            <a:pPr marL="0" indent="0" algn="ctr">
-              <a:buNone/>
-            </a:pPr>
-            <a:r>
-              <a:rPr lang="en-US" sz="1500" b="1" dirty="0">
-                <a:solidFill>
-                  <a:srgbClr val="21295C"/>
-                </a:solidFill>
-                <a:latin typeface="Cambria" pitchFamily="34" charset="0"/>
-                <a:ea typeface="Cambria" pitchFamily="34" charset="-122"/>
-                <a:cs typeface="Cambria" pitchFamily="34" charset="-120"/>
-              </a:rPr>
-              <a:t>Supercías</a:t>
-            </a:r>
-            <a:endParaRPr lang="en-US" sz="1500" dirty="0"/>
-          </a:p>
-        </p:txBody>
-      </p:sp>
-      <p:sp>
-        <p:nvSpPr>
-          <p:cNvPr id="28" name="Text 23"/>
-          <p:cNvSpPr/>
-          <p:nvPr/>
-        </p:nvSpPr>
-        <p:spPr>
-          <a:xfrm>
-            <a:off x="6355080" y="3246120"/>
-            <a:ext cx="2340864" cy="685800"/>
-          </a:xfrm>
-          <a:prstGeom prst="rect">
-            <a:avLst/>
-          </a:prstGeom>
-          <a:noFill/>
-          <a:ln/>
-        </p:spPr>
-        <p:txBody>
-          <a:bodyPr wrap="square" rtlCol="0" anchor="t"/>
-          <a:lstStyle/>
-          <a:p>
-            <a:pPr marL="0" indent="0" algn="ctr">
-              <a:buNone/>
-            </a:pPr>
-            <a:r>
-              <a:rPr lang="en-US" sz="1000" i="1" dirty="0">
-                <a:solidFill>
-                  <a:srgbClr val="6B7480"/>
-                </a:solidFill>
-                <a:latin typeface="Calibri" pitchFamily="34" charset="0"/>
-                <a:ea typeface="Calibri" pitchFamily="34" charset="-122"/>
-                <a:cs typeface="Calibri" pitchFamily="34" charset="-120"/>
-              </a:rPr>
-              <a:t>Superintendencia de Compañías</a:t>
-            </a:r>
-            <a:endParaRPr lang="en-US" sz="1000" dirty="0"/>
-          </a:p>
-        </p:txBody>
-      </p:sp>
-      <p:sp>
-        <p:nvSpPr>
-          <p:cNvPr id="29" name="Shape 24"/>
-          <p:cNvSpPr/>
-          <p:nvPr/>
-        </p:nvSpPr>
-        <p:spPr>
-          <a:xfrm>
-            <a:off x="6492240" y="3977640"/>
-            <a:ext cx="2066544" cy="0"/>
-          </a:xfrm>
-          <a:prstGeom prst="line">
-            <a:avLst/>
-          </a:prstGeom>
-          <a:noFill/>
-          <a:ln w="12700">
-            <a:solidFill>
-              <a:srgbClr val="E3E8EB"/>
-            </a:solidFill>
-            <a:prstDash val="solid"/>
-          </a:ln>
-        </p:spPr>
-        <p:txBody>
-          <a:bodyPr/>
-          <a:lstStyle/>
-          <a:p>
-            <a:endParaRPr lang="es-EC"/>
-          </a:p>
-        </p:txBody>
-      </p:sp>
-      <p:sp>
-        <p:nvSpPr>
-          <p:cNvPr id="30" name="Text 25"/>
-          <p:cNvSpPr/>
-          <p:nvPr/>
-        </p:nvSpPr>
-        <p:spPr>
-          <a:xfrm>
-            <a:off x="6382512" y="4114800"/>
-            <a:ext cx="2286000" cy="868680"/>
-          </a:xfrm>
-          <a:prstGeom prst="rect">
-            <a:avLst/>
-          </a:prstGeom>
-          <a:noFill/>
-          <a:ln/>
-        </p:spPr>
-        <p:txBody>
-          <a:bodyPr wrap="square" rtlCol="0" anchor="t"/>
-          <a:lstStyle/>
-          <a:p>
-            <a:pPr marL="0" indent="0" algn="ctr">
-              <a:buNone/>
-            </a:pPr>
-            <a:r>
-              <a:rPr lang="en-US" sz="1050" dirty="0">
-                <a:solidFill>
-                  <a:srgbClr val="2B2B33"/>
-                </a:solidFill>
-                <a:latin typeface="Calibri" pitchFamily="34" charset="0"/>
-                <a:ea typeface="Calibri" pitchFamily="34" charset="-122"/>
-                <a:cs typeface="Calibri" pitchFamily="34" charset="-120"/>
-              </a:rPr>
-              <a:t>3 datasets · + ranking financiero</a:t>
-            </a:r>
-            <a:endParaRPr lang="en-US" sz="1050" dirty="0"/>
-          </a:p>
-        </p:txBody>
-      </p:sp>
-      <p:sp>
-        <p:nvSpPr>
-          <p:cNvPr id="31" name="Shape 26"/>
-          <p:cNvSpPr/>
-          <p:nvPr/>
-        </p:nvSpPr>
-        <p:spPr>
-          <a:xfrm>
-            <a:off x="9052560" y="1828800"/>
-            <a:ext cx="2615184" cy="3291840"/>
-          </a:xfrm>
-          <a:prstGeom prst="roundRect">
-            <a:avLst>
-              <a:gd name="adj" fmla="val 2797"/>
-            </a:avLst>
-          </a:prstGeom>
-          <a:solidFill>
-            <a:srgbClr val="FFFFFF"/>
-          </a:solidFill>
-          <a:ln w="12700">
-            <a:solidFill>
-              <a:srgbClr val="E3E8EB"/>
-            </a:solidFill>
-            <a:prstDash val="solid"/>
-          </a:ln>
-        </p:spPr>
-        <p:txBody>
-          <a:bodyPr/>
-          <a:lstStyle/>
-          <a:p>
-            <a:endParaRPr lang="es-EC"/>
-          </a:p>
-        </p:txBody>
-      </p:sp>
-      <p:sp>
-        <p:nvSpPr>
-          <p:cNvPr id="32" name="Shape 27"/>
-          <p:cNvSpPr/>
-          <p:nvPr/>
-        </p:nvSpPr>
-        <p:spPr>
-          <a:xfrm>
-            <a:off x="9052560" y="1828800"/>
-            <a:ext cx="2615184" cy="914400"/>
-          </a:xfrm>
-          <a:prstGeom prst="roundRect">
-            <a:avLst>
-              <a:gd name="adj" fmla="val 8000"/>
-            </a:avLst>
-          </a:prstGeom>
-          <a:solidFill>
-            <a:srgbClr val="065A82"/>
-          </a:solidFill>
-          <a:ln/>
-        </p:spPr>
-        <p:txBody>
-          <a:bodyPr/>
-          <a:lstStyle/>
-          <a:p>
-            <a:endParaRPr lang="es-EC"/>
-          </a:p>
-        </p:txBody>
-      </p:sp>
-      <p:sp>
-        <p:nvSpPr>
-          <p:cNvPr id="33" name="Shape 28"/>
-          <p:cNvSpPr/>
-          <p:nvPr/>
-        </p:nvSpPr>
-        <p:spPr>
-          <a:xfrm>
-            <a:off x="9052560" y="2331720"/>
-            <a:ext cx="2615184" cy="411480"/>
-          </a:xfrm>
-          <a:prstGeom prst="rect">
-            <a:avLst/>
-          </a:prstGeom>
-          <a:solidFill>
-            <a:srgbClr val="065A82"/>
-          </a:solidFill>
-          <a:ln/>
-        </p:spPr>
-        <p:txBody>
-          <a:bodyPr/>
-          <a:lstStyle/>
-          <a:p>
-            <a:endParaRPr lang="es-EC"/>
-          </a:p>
-        </p:txBody>
-      </p:sp>
-      <p:sp>
-        <p:nvSpPr>
-          <p:cNvPr id="34" name="Shape 29"/>
-          <p:cNvSpPr/>
-          <p:nvPr/>
-        </p:nvSpPr>
-        <p:spPr>
-          <a:xfrm>
-            <a:off x="10062972" y="1993392"/>
-            <a:ext cx="594360" cy="594360"/>
-          </a:xfrm>
-          <a:prstGeom prst="ellipse">
-            <a:avLst/>
-          </a:prstGeom>
-          <a:solidFill>
-            <a:srgbClr val="1C7293"/>
-          </a:solidFill>
-          <a:ln/>
-        </p:spPr>
-        <p:txBody>
-          <a:bodyPr/>
-          <a:lstStyle/>
-          <a:p>
-            <a:endParaRPr lang="es-EC"/>
-          </a:p>
-        </p:txBody>
-      </p:sp>
-      <p:pic>
-        <p:nvPicPr>
-          <p:cNvPr id="35" name="Image 3" descr="icons/bookOpen_white.png"/>
-          <p:cNvPicPr>
-            <a:picLocks noChangeAspect="1"/>
-          </p:cNvPicPr>
-          <p:nvPr/>
-        </p:nvPicPr>
-        <p:blipFill>
-          <a:blip r:embed="rId6"/>
-          <a:stretch>
-            <a:fillRect/>
-          </a:stretch>
-        </p:blipFill>
-        <p:spPr>
-          <a:xfrm>
-            <a:off x="10217506" y="2147926"/>
-            <a:ext cx="285293" cy="285293"/>
-          </a:xfrm>
-          <a:prstGeom prst="rect">
-            <a:avLst/>
-          </a:prstGeom>
-        </p:spPr>
-      </p:pic>
-      <p:sp>
-        <p:nvSpPr>
-          <p:cNvPr id="36" name="Text 30"/>
-          <p:cNvSpPr/>
-          <p:nvPr/>
-        </p:nvSpPr>
-        <p:spPr>
-          <a:xfrm>
-            <a:off x="9144000" y="2834640"/>
-            <a:ext cx="2432304" cy="365760"/>
-          </a:xfrm>
-          <a:prstGeom prst="rect">
-            <a:avLst/>
-          </a:prstGeom>
-          <a:noFill/>
-          <a:ln/>
-        </p:spPr>
-        <p:txBody>
-          <a:bodyPr wrap="square" rtlCol="0" anchor="ctr"/>
-          <a:lstStyle/>
-          <a:p>
-            <a:pPr marL="0" indent="0" algn="ctr">
-              <a:buNone/>
-            </a:pPr>
-            <a:r>
-              <a:rPr lang="en-US" sz="1500" b="1" dirty="0">
-                <a:solidFill>
-                  <a:srgbClr val="21295C"/>
-                </a:solidFill>
-                <a:latin typeface="Cambria" pitchFamily="34" charset="0"/>
-                <a:ea typeface="Cambria" pitchFamily="34" charset="-122"/>
-                <a:cs typeface="Cambria" pitchFamily="34" charset="-120"/>
-              </a:rPr>
-              <a:t>MINEDUC</a:t>
-            </a:r>
-            <a:endParaRPr lang="en-US" sz="1500" dirty="0"/>
-          </a:p>
-        </p:txBody>
-      </p:sp>
-      <p:sp>
-        <p:nvSpPr>
-          <p:cNvPr id="37" name="Text 31"/>
-          <p:cNvSpPr/>
-          <p:nvPr/>
-        </p:nvSpPr>
-        <p:spPr>
-          <a:xfrm>
-            <a:off x="9189720" y="3246120"/>
-            <a:ext cx="2340864" cy="685800"/>
-          </a:xfrm>
-          <a:prstGeom prst="rect">
-            <a:avLst/>
-          </a:prstGeom>
-          <a:noFill/>
-          <a:ln/>
-        </p:spPr>
-        <p:txBody>
-          <a:bodyPr wrap="square" rtlCol="0" anchor="t"/>
-          <a:lstStyle/>
-          <a:p>
-            <a:pPr marL="0" indent="0" algn="ctr">
-              <a:buNone/>
-            </a:pPr>
-            <a:r>
-              <a:rPr lang="en-US" sz="1000" i="1" dirty="0">
-                <a:solidFill>
-                  <a:srgbClr val="6B7480"/>
-                </a:solidFill>
-                <a:latin typeface="Calibri" pitchFamily="34" charset="0"/>
-                <a:ea typeface="Calibri" pitchFamily="34" charset="-122"/>
-                <a:cs typeface="Calibri" pitchFamily="34" charset="-120"/>
-              </a:rPr>
-              <a:t>Ministerio de Educación</a:t>
-            </a:r>
-            <a:endParaRPr lang="en-US" sz="1000" dirty="0"/>
-          </a:p>
-        </p:txBody>
-      </p:sp>
-      <p:sp>
-        <p:nvSpPr>
-          <p:cNvPr id="38" name="Shape 32"/>
-          <p:cNvSpPr/>
-          <p:nvPr/>
-        </p:nvSpPr>
-        <p:spPr>
-          <a:xfrm>
-            <a:off x="9326880" y="3977640"/>
-            <a:ext cx="2066544" cy="0"/>
-          </a:xfrm>
-          <a:prstGeom prst="line">
-            <a:avLst/>
-          </a:prstGeom>
-          <a:noFill/>
-          <a:ln w="12700">
-            <a:solidFill>
-              <a:srgbClr val="E3E8EB"/>
-            </a:solidFill>
-            <a:prstDash val="solid"/>
-          </a:ln>
-        </p:spPr>
-        <p:txBody>
-          <a:bodyPr/>
-          <a:lstStyle/>
-          <a:p>
-            <a:endParaRPr lang="es-EC"/>
-          </a:p>
-        </p:txBody>
-      </p:sp>
-      <p:sp>
-        <p:nvSpPr>
-          <p:cNvPr id="39" name="Text 33"/>
-          <p:cNvSpPr/>
-          <p:nvPr/>
-        </p:nvSpPr>
-        <p:spPr>
-          <a:xfrm>
-            <a:off x="9217152" y="4114800"/>
-            <a:ext cx="2286000" cy="868680"/>
-          </a:xfrm>
-          <a:prstGeom prst="rect">
-            <a:avLst/>
-          </a:prstGeom>
-          <a:noFill/>
-          <a:ln/>
-        </p:spPr>
-        <p:txBody>
-          <a:bodyPr wrap="square" rtlCol="0" anchor="t"/>
-          <a:lstStyle/>
-          <a:p>
-            <a:pPr marL="0" indent="0" algn="ctr">
-              <a:buNone/>
-            </a:pPr>
-            <a:r>
-              <a:rPr lang="en-US" sz="1050" dirty="0">
-                <a:solidFill>
-                  <a:srgbClr val="2B2B33"/>
-                </a:solidFill>
-                <a:latin typeface="Calibri" pitchFamily="34" charset="0"/>
-                <a:ea typeface="Calibri" pitchFamily="34" charset="-122"/>
-                <a:cs typeface="Calibri" pitchFamily="34" charset="-120"/>
-              </a:rPr>
-              <a:t>1 dataset · Bachilleres por institución (AMIE)</a:t>
-            </a:r>
-            <a:endParaRPr lang="en-US" sz="1050" dirty="0"/>
-          </a:p>
-        </p:txBody>
-      </p:sp>
-      <p:sp>
-        <p:nvSpPr>
-          <p:cNvPr id="40" name="Shape 34"/>
-          <p:cNvSpPr/>
-          <p:nvPr/>
-        </p:nvSpPr>
-        <p:spPr>
-          <a:xfrm>
-            <a:off x="548640" y="5440680"/>
-            <a:ext cx="11064240" cy="777240"/>
-          </a:xfrm>
-          <a:prstGeom prst="roundRect">
-            <a:avLst>
-              <a:gd name="adj" fmla="val 9412"/>
-            </a:avLst>
-          </a:prstGeom>
-          <a:solidFill>
-            <a:srgbClr val="EAF1F4"/>
-          </a:solidFill>
-          <a:ln/>
-        </p:spPr>
-        <p:txBody>
-          <a:bodyPr/>
-          <a:lstStyle/>
-          <a:p>
-            <a:endParaRPr lang="es-EC"/>
-          </a:p>
-        </p:txBody>
-      </p:sp>
-      <p:sp>
-        <p:nvSpPr>
-          <p:cNvPr id="41" name="Text 35"/>
-          <p:cNvSpPr/>
-          <p:nvPr/>
-        </p:nvSpPr>
-        <p:spPr>
-          <a:xfrm>
-            <a:off x="822960" y="5440680"/>
-            <a:ext cx="10515600" cy="777240"/>
-          </a:xfrm>
-          <a:prstGeom prst="rect">
-            <a:avLst/>
-          </a:prstGeom>
-          <a:noFill/>
-          <a:ln/>
-        </p:spPr>
-        <p:txBody>
-          <a:bodyPr wrap="square" rtlCol="0" anchor="ctr"/>
-          <a:lstStyle/>
-          <a:p>
-            <a:pPr marL="0" indent="0">
-              <a:buNone/>
-            </a:pPr>
-            <a:r>
-              <a:rPr lang="en-US" sz="1300" b="1" dirty="0">
-                <a:solidFill>
-                  <a:srgbClr val="21295C"/>
-                </a:solidFill>
-                <a:latin typeface="Calibri" pitchFamily="34" charset="0"/>
-                <a:ea typeface="Calibri" pitchFamily="34" charset="-122"/>
-                <a:cs typeface="Calibri" pitchFamily="34" charset="-120"/>
-              </a:rPr>
-              <a:t>12 datasets integrados  ·  </a:t>
-            </a:r>
-            <a:r>
-              <a:rPr lang="en-US" sz="1300" dirty="0" err="1">
-                <a:solidFill>
-                  <a:srgbClr val="2B2B33"/>
-                </a:solidFill>
-                <a:latin typeface="Calibri" pitchFamily="34" charset="0"/>
-                <a:ea typeface="Calibri" pitchFamily="34" charset="-122"/>
-                <a:cs typeface="Calibri" pitchFamily="34" charset="-120"/>
-              </a:rPr>
-              <a:t>más</a:t>
-            </a:r>
-            <a:r>
-              <a:rPr lang="en-US" sz="1300" dirty="0">
-                <a:solidFill>
-                  <a:srgbClr val="2B2B33"/>
-                </a:solidFill>
-                <a:latin typeface="Calibri" pitchFamily="34" charset="0"/>
-                <a:ea typeface="Calibri" pitchFamily="34" charset="-122"/>
-                <a:cs typeface="Calibri" pitchFamily="34" charset="-120"/>
-              </a:rPr>
-              <a:t> de 1.6mill </a:t>
-            </a:r>
-            <a:r>
-              <a:rPr lang="en-US" sz="1300" dirty="0" err="1">
-                <a:solidFill>
-                  <a:srgbClr val="2B2B33"/>
-                </a:solidFill>
-                <a:latin typeface="Calibri" pitchFamily="34" charset="0"/>
-                <a:ea typeface="Calibri" pitchFamily="34" charset="-122"/>
-                <a:cs typeface="Calibri" pitchFamily="34" charset="-120"/>
-              </a:rPr>
-              <a:t>registros</a:t>
-            </a:r>
-            <a:r>
-              <a:rPr lang="en-US" sz="1300" dirty="0">
-                <a:solidFill>
-                  <a:srgbClr val="2B2B33"/>
-                </a:solidFill>
-                <a:latin typeface="Calibri" pitchFamily="34" charset="0"/>
-                <a:ea typeface="Calibri" pitchFamily="34" charset="-122"/>
-                <a:cs typeface="Calibri" pitchFamily="34" charset="-120"/>
-              </a:rPr>
-              <a:t> consolidados en un esquema relacional único</a:t>
-            </a:r>
-            <a:endParaRPr lang="en-US" sz="1300" dirty="0"/>
-          </a:p>
-        </p:txBody>
-      </p:sp>
-      <p:sp>
-        <p:nvSpPr>
-          <p:cNvPr id="42" name="Text 36"/>
-          <p:cNvSpPr/>
-          <p:nvPr/>
-        </p:nvSpPr>
-        <p:spPr>
-          <a:xfrm>
-            <a:off x="11365992" y="6400800"/>
-            <a:ext cx="548640" cy="274320"/>
-          </a:xfrm>
-          <a:prstGeom prst="rect">
-            <a:avLst/>
-          </a:prstGeom>
-          <a:noFill/>
-          <a:ln/>
-        </p:spPr>
-        <p:txBody>
-          <a:bodyPr wrap="square" rtlCol="0" anchor="ctr"/>
-          <a:lstStyle/>
-          <a:p>
-            <a:pPr marL="0" indent="0" algn="r">
-              <a:buNone/>
-            </a:pPr>
-            <a:r>
-              <a:rPr lang="en-US" sz="1000" dirty="0">
-                <a:solidFill>
-                  <a:srgbClr val="6B7480"/>
-                </a:solidFill>
-                <a:latin typeface="Calibri" pitchFamily="34" charset="0"/>
-                <a:ea typeface="Calibri" pitchFamily="34" charset="-122"/>
-                <a:cs typeface="Calibri" pitchFamily="34" charset="-120"/>
-              </a:rPr>
-              <a:t>08</a:t>
-            </a:r>
-            <a:endParaRPr lang="en-US" sz="1000" dirty="0"/>
-          </a:p>
-        </p:txBody>
-      </p:sp>
-    </p:spTree>
-  </p:cSld>
-  <p:clrMapOvr>
-    <a:masterClrMapping/>
-  </p:clrMapOvr>
-</p:sld>
-</file>
-
-<file path=ppt/slides/slide5.xml><?xml version="1.0" encoding="utf-8"?>
 <p:sld xmlns:a="http://schemas.openxmlformats.org/drawingml/2006/main" xmlns:r="http://schemas.openxmlformats.org/officeDocument/2006/relationships" xmlns:p="http://schemas.openxmlformats.org/presentationml/2006/main">
   <p:cSld name="Slide 9">
     <p:bg>
@@ -5126,10 +3456,10 @@
       </p:sp>
       <p:pic>
         <p:nvPicPr>
-          <p:cNvPr id="26" name="Imagen 25">
+          <p:cNvPr id="5" name="Imagen 4">
             <a:extLst>
               <a:ext uri="{FF2B5EF4-FFF2-40B4-BE49-F238E27FC236}">
-                <a16:creationId xmlns:a16="http://schemas.microsoft.com/office/drawing/2014/main" id="{1C5BE4CB-5FD4-3D60-9F69-F13C536A294C}"/>
+                <a16:creationId xmlns:a16="http://schemas.microsoft.com/office/drawing/2014/main" id="{01625D75-FEFC-8FA5-5E0A-CF1EC92CF8C0}"/>
               </a:ext>
             </a:extLst>
           </p:cNvPr>
@@ -5140,14 +3470,15 @@
         </p:nvPicPr>
         <p:blipFill>
           <a:blip r:embed="rId3"/>
+          <a:srcRect b="27261"/>
           <a:stretch>
             <a:fillRect/>
           </a:stretch>
         </p:blipFill>
         <p:spPr>
           <a:xfrm>
-            <a:off x="2240280" y="1536192"/>
-            <a:ext cx="7711440" cy="4957354"/>
+            <a:off x="205229" y="1962023"/>
+            <a:ext cx="11781541" cy="2134116"/>
           </a:xfrm>
           <a:prstGeom prst="rect">
             <a:avLst/>
@@ -5162,7 +3493,7 @@
 </p:sld>
 </file>
 
-<file path=ppt/slides/slide6.xml><?xml version="1.0" encoding="utf-8"?>
+<file path=ppt/slides/slide5.xml><?xml version="1.0" encoding="utf-8"?>
 <p:sld xmlns:a="http://schemas.openxmlformats.org/drawingml/2006/main" xmlns:r="http://schemas.openxmlformats.org/officeDocument/2006/relationships" xmlns:p="http://schemas.openxmlformats.org/presentationml/2006/main">
   <p:cSld name="Slide 14">
     <p:bg>
@@ -5220,7 +3551,18 @@
                 <a:ea typeface="Cambria" pitchFamily="34" charset="-122"/>
                 <a:cs typeface="Cambria" pitchFamily="34" charset="-120"/>
               </a:rPr>
-              <a:t>Seis vistas analíticas para decisiones estratégicas</a:t>
+              <a:t>Vistas </a:t>
+            </a:r>
+            <a:r>
+              <a:rPr lang="en-US" sz="3000" b="1" dirty="0" err="1">
+                <a:solidFill>
+                  <a:srgbClr val="21295C"/>
+                </a:solidFill>
+                <a:latin typeface="Cambria" pitchFamily="34" charset="0"/>
+                <a:ea typeface="Cambria" pitchFamily="34" charset="-122"/>
+                <a:cs typeface="Cambria" pitchFamily="34" charset="-120"/>
+              </a:rPr>
+              <a:t>analíticas</a:t>
             </a:r>
             <a:endParaRPr lang="en-US" sz="3000" dirty="0"/>
           </a:p>
@@ -6567,7 +4909,7 @@
 </p:sld>
 </file>
 
-<file path=ppt/slides/slide7.xml><?xml version="1.0" encoding="utf-8"?>
+<file path=ppt/slides/slide6.xml><?xml version="1.0" encoding="utf-8"?>
 <p:sld xmlns:a="http://schemas.openxmlformats.org/drawingml/2006/main" xmlns:r="http://schemas.openxmlformats.org/officeDocument/2006/relationships" xmlns:p="http://schemas.openxmlformats.org/presentationml/2006/main">
   <p:cSld>
     <p:spTree>
@@ -6837,7 +5179,7 @@
 </p:sld>
 </file>
 
-<file path=ppt/slides/slide8.xml><?xml version="1.0" encoding="utf-8"?>
+<file path=ppt/slides/slide7.xml><?xml version="1.0" encoding="utf-8"?>
 <p:sld xmlns:a="http://schemas.openxmlformats.org/drawingml/2006/main" xmlns:r="http://schemas.openxmlformats.org/officeDocument/2006/relationships" xmlns:p="http://schemas.openxmlformats.org/presentationml/2006/main">
   <p:cSld>
     <p:spTree>
@@ -7035,7 +5377,7 @@
 </p:sld>
 </file>
 
-<file path=ppt/slides/slide9.xml><?xml version="1.0" encoding="utf-8"?>
+<file path=ppt/slides/slide8.xml><?xml version="1.0" encoding="utf-8"?>
 <p:sld xmlns:a="http://schemas.openxmlformats.org/drawingml/2006/main" xmlns:r="http://schemas.openxmlformats.org/officeDocument/2006/relationships" xmlns:p="http://schemas.openxmlformats.org/presentationml/2006/main">
   <p:cSld name="Slide 18">
     <p:bg>
@@ -7062,14 +5404,14 @@
       </p:grpSpPr>
       <p:sp>
         <p:nvSpPr>
-          <p:cNvPr id="2" name="Text 0"/>
-          <p:cNvSpPr/>
-          <p:nvPr/>
-        </p:nvSpPr>
-        <p:spPr>
-          <a:xfrm>
-            <a:off x="548640" y="411480"/>
-            <a:ext cx="7315200" cy="320040"/>
+          <p:cNvPr id="3" name="Text 1"/>
+          <p:cNvSpPr/>
+          <p:nvPr/>
+        </p:nvSpPr>
+        <p:spPr>
+          <a:xfrm>
+            <a:off x="548640" y="713232"/>
+            <a:ext cx="10881360" cy="822960"/>
           </a:xfrm>
           <a:prstGeom prst="rect">
             <a:avLst/>
@@ -7085,46 +5427,7 @@
               <a:buNone/>
             </a:pPr>
             <a:r>
-              <a:rPr lang="en-US" sz="1200" b="1" kern="0" spc="200" dirty="0">
-                <a:solidFill>
-                  <a:srgbClr val="CADCFC"/>
-                </a:solidFill>
-                <a:latin typeface="Calibri" pitchFamily="34" charset="0"/>
-                <a:ea typeface="Calibri" pitchFamily="34" charset="-122"/>
-                <a:cs typeface="Calibri" pitchFamily="34" charset="-120"/>
-              </a:rPr>
-              <a:t>CONCLUSIONES</a:t>
-            </a:r>
-            <a:endParaRPr lang="en-US" sz="1200" dirty="0"/>
-          </a:p>
-        </p:txBody>
-      </p:sp>
-      <p:sp>
-        <p:nvSpPr>
-          <p:cNvPr id="3" name="Text 1"/>
-          <p:cNvSpPr/>
-          <p:nvPr/>
-        </p:nvSpPr>
-        <p:spPr>
-          <a:xfrm>
-            <a:off x="548640" y="713232"/>
-            <a:ext cx="10881360" cy="822960"/>
-          </a:xfrm>
-          <a:prstGeom prst="rect">
-            <a:avLst/>
-          </a:prstGeom>
-          <a:noFill/>
-          <a:ln/>
-        </p:spPr>
-        <p:txBody>
-          <a:bodyPr wrap="square" rtlCol="0" anchor="ctr"/>
-          <a:lstStyle/>
-          <a:p>
-            <a:pPr marL="0" indent="0">
-              <a:buNone/>
-            </a:pPr>
-            <a:r>
-              <a:rPr lang="en-US" sz="2800" b="1" dirty="0">
+              <a:rPr lang="en-US" sz="2800" b="1" dirty="0" err="1">
                 <a:solidFill>
                   <a:srgbClr val="FFFFFF"/>
                 </a:solidFill>
@@ -7132,7 +5435,7 @@
                 <a:ea typeface="Cambria" pitchFamily="34" charset="-122"/>
                 <a:cs typeface="Cambria" pitchFamily="34" charset="-120"/>
               </a:rPr>
-              <a:t>De dos retos académicos a una infraestructura de datos real</a:t>
+              <a:t>Conclusiones</a:t>
             </a:r>
             <a:endParaRPr lang="en-US" sz="2800" dirty="0"/>
           </a:p>
@@ -7782,6 +6085,198 @@
               <a:t>18</a:t>
             </a:r>
             <a:endParaRPr lang="en-US" sz="1000" dirty="0"/>
+          </a:p>
+        </p:txBody>
+      </p:sp>
+    </p:spTree>
+  </p:cSld>
+  <p:clrMapOvr>
+    <a:masterClrMapping/>
+  </p:clrMapOvr>
+</p:sld>
+</file>
+
+<file path=ppt/slides/slide9.xml><?xml version="1.0" encoding="utf-8"?>
+<p:sld xmlns:a="http://schemas.openxmlformats.org/drawingml/2006/main" xmlns:r="http://schemas.openxmlformats.org/officeDocument/2006/relationships" xmlns:p="http://schemas.openxmlformats.org/presentationml/2006/main">
+  <p:cSld name="Slide 19">
+    <p:bg>
+      <p:bgPr>
+        <a:solidFill>
+          <a:srgbClr val="21295C"/>
+        </a:solidFill>
+        <a:effectLst/>
+      </p:bgPr>
+    </p:bg>
+    <p:spTree>
+      <p:nvGrpSpPr>
+        <p:cNvPr id="1" name=""/>
+        <p:cNvGrpSpPr/>
+        <p:nvPr/>
+      </p:nvGrpSpPr>
+      <p:grpSpPr>
+        <a:xfrm>
+          <a:off x="0" y="0"/>
+          <a:ext cx="0" cy="0"/>
+          <a:chOff x="0" y="0"/>
+          <a:chExt cx="0" cy="0"/>
+        </a:xfrm>
+      </p:grpSpPr>
+      <p:sp>
+        <p:nvSpPr>
+          <p:cNvPr id="3" name="Shape 1"/>
+          <p:cNvSpPr/>
+          <p:nvPr/>
+        </p:nvSpPr>
+        <p:spPr>
+          <a:xfrm>
+            <a:off x="0" y="0"/>
+            <a:ext cx="3959352" cy="2194560"/>
+          </a:xfrm>
+          <a:prstGeom prst="rect">
+            <a:avLst/>
+          </a:prstGeom>
+          <a:solidFill>
+            <a:srgbClr val="065A82"/>
+          </a:solidFill>
+          <a:ln/>
+        </p:spPr>
+        <p:txBody>
+          <a:bodyPr/>
+          <a:lstStyle/>
+          <a:p>
+            <a:endParaRPr lang="es-EC"/>
+          </a:p>
+        </p:txBody>
+      </p:sp>
+      <p:sp>
+        <p:nvSpPr>
+          <p:cNvPr id="4" name="Shape 2"/>
+          <p:cNvSpPr/>
+          <p:nvPr/>
+        </p:nvSpPr>
+        <p:spPr>
+          <a:xfrm>
+            <a:off x="0" y="2148840"/>
+            <a:ext cx="3410712" cy="2194560"/>
+          </a:xfrm>
+          <a:prstGeom prst="rect">
+            <a:avLst/>
+          </a:prstGeom>
+          <a:solidFill>
+            <a:srgbClr val="1C7293"/>
+          </a:solidFill>
+          <a:ln/>
+        </p:spPr>
+        <p:txBody>
+          <a:bodyPr/>
+          <a:lstStyle/>
+          <a:p>
+            <a:endParaRPr lang="es-EC"/>
+          </a:p>
+        </p:txBody>
+      </p:sp>
+      <p:sp>
+        <p:nvSpPr>
+          <p:cNvPr id="5" name="Shape 3"/>
+          <p:cNvSpPr/>
+          <p:nvPr/>
+        </p:nvSpPr>
+        <p:spPr>
+          <a:xfrm>
+            <a:off x="0" y="4297680"/>
+            <a:ext cx="2862072" cy="2194560"/>
+          </a:xfrm>
+          <a:prstGeom prst="rect">
+            <a:avLst/>
+          </a:prstGeom>
+          <a:solidFill>
+            <a:srgbClr val="5FB3A3"/>
+          </a:solidFill>
+          <a:ln/>
+        </p:spPr>
+        <p:txBody>
+          <a:bodyPr/>
+          <a:lstStyle/>
+          <a:p>
+            <a:endParaRPr lang="es-EC"/>
+          </a:p>
+        </p:txBody>
+      </p:sp>
+      <p:sp>
+        <p:nvSpPr>
+          <p:cNvPr id="6" name="Text 4"/>
+          <p:cNvSpPr/>
+          <p:nvPr/>
+        </p:nvSpPr>
+        <p:spPr>
+          <a:xfrm>
+            <a:off x="4572000" y="2468880"/>
+            <a:ext cx="6949440" cy="1005840"/>
+          </a:xfrm>
+          <a:prstGeom prst="rect">
+            <a:avLst/>
+          </a:prstGeom>
+          <a:noFill/>
+          <a:ln/>
+        </p:spPr>
+        <p:txBody>
+          <a:bodyPr wrap="square" rtlCol="0" anchor="ctr"/>
+          <a:lstStyle/>
+          <a:p>
+            <a:pPr marL="0" indent="0">
+              <a:buNone/>
+            </a:pPr>
+            <a:r>
+              <a:rPr lang="en-US" sz="4200" b="1" dirty="0">
+                <a:solidFill>
+                  <a:srgbClr val="FFFFFF"/>
+                </a:solidFill>
+                <a:latin typeface="Cambria" pitchFamily="34" charset="0"/>
+                <a:ea typeface="Cambria" pitchFamily="34" charset="-122"/>
+                <a:cs typeface="Cambria" pitchFamily="34" charset="-120"/>
+              </a:rPr>
+              <a:t>Gracias</a:t>
+            </a:r>
+            <a:endParaRPr lang="en-US" sz="4200" dirty="0"/>
+          </a:p>
+        </p:txBody>
+      </p:sp>
+      <p:sp>
+        <p:nvSpPr>
+          <p:cNvPr id="8" name="Text 6"/>
+          <p:cNvSpPr/>
+          <p:nvPr/>
+        </p:nvSpPr>
+        <p:spPr>
+          <a:xfrm>
+            <a:off x="4572000" y="4114800"/>
+            <a:ext cx="6400800" cy="365760"/>
+          </a:xfrm>
+          <a:prstGeom prst="rect">
+            <a:avLst/>
+          </a:prstGeom>
+          <a:noFill/>
+          <a:ln/>
+        </p:spPr>
+        <p:txBody>
+          <a:bodyPr wrap="square" rtlCol="0" anchor="ctr"/>
+          <a:lstStyle/>
+          <a:p>
+            <a:pPr marL="0" indent="0">
+              <a:buNone/>
+            </a:pPr>
+            <a:r>
+              <a:rPr lang="en-US" sz="1300" b="1" dirty="0">
+                <a:solidFill>
+                  <a:srgbClr val="FFFFFF"/>
+                </a:solidFill>
+                <a:latin typeface="Calibri" pitchFamily="34" charset="0"/>
+                <a:ea typeface="Calibri" pitchFamily="34" charset="-122"/>
+                <a:cs typeface="Calibri" pitchFamily="34" charset="-120"/>
+              </a:rPr>
+              <a:t>Mateo Leonardo Yaguache Plaza</a:t>
+            </a:r>
+            <a:endParaRPr lang="en-US" sz="1300" dirty="0"/>
           </a:p>
         </p:txBody>
       </p:sp>
